--- a/docs/ai-workflow-sharing-v1.pptx
+++ b/docs/ai-workflow-sharing-v1.pptx
@@ -28,8 +28,8 @@
     <p:sldId id="273" r:id="rId19"/>
     <p:sldId id="274" r:id="rId20"/>
     <p:sldId id="275" r:id="rId21"/>
-    <p:sldId id="276" r:id="rId22"/>
-    <p:sldId id="277" r:id="rId23"/>
+    <p:sldId id="277" r:id="rId22"/>
+    <p:sldId id="276" r:id="rId23"/>
     <p:sldId id="278" r:id="rId24"/>
     <p:sldId id="279" r:id="rId25"/>
     <p:sldId id="280" r:id="rId26"/>
@@ -1379,9 +1379,9 @@
           <a:lstStyle/>
           <a:p>
             <a:r>
-              <a:t>层级：H1 &gt; H2「代码规范」。
-【v2 待办】一页一主题，或一张工具链图：commit 时 pre-commit → ruff → mypy → pytest 的触发顺序。
-INIT.sh 建议给出实际内容与用途（新仓库一键初始化）。</a:t>
+              <a:t>层级：H1 &gt; H2「怎么写 prompt」。
+docx 中该 H2 下只有一句，与标题不完全对齐——需确认是「prompt 写法」还是「Desktop 与 Web 联动」。
+【v2 待办】若是 prompt 写法：给「差 prompt → 好 prompt」对照。</a:t>
             </a:r>
           </a:p>
         </p:txBody>
@@ -1458,9 +1458,9 @@
           <a:lstStyle/>
           <a:p>
             <a:r>
-              <a:t>层级：H1 &gt; H2「怎么写 prompt」。
-docx 中该 H2 下只有一句，与标题不完全对齐——需确认是「prompt 写法」还是「Desktop 与 Web 联动」。
-【v2 待办】若是 prompt 写法：给「差 prompt → 好 prompt」对照。</a:t>
+              <a:t>层级：H1 &gt; H2「代码规范」。
+【v2 待办】一页一主题，或一张工具链图：commit 时 pre-commit → ruff → mypy → pytest 的触发顺序。
+INIT.sh 建议给出实际内容与用途（新仓库一键初始化）。</a:t>
             </a:r>
           </a:p>
         </p:txBody>
@@ -6327,8 +6327,8 @@
         </p:nvSpPr>
         <p:spPr>
           <a:xfrm>
-            <a:off x="457200" y="1572768"/>
-            <a:ext cx="8229600" cy="3035808"/>
+            <a:off x="457200" y="1572767"/>
+            <a:ext cx="8229600" cy="3145193"/>
           </a:xfrm>
           <a:prstGeom prst="roundRect">
             <a:avLst>
@@ -6369,8 +6369,8 @@
         </p:nvSpPr>
         <p:spPr>
           <a:xfrm>
-            <a:off x="777240" y="1828800"/>
-            <a:ext cx="7589520" cy="2560320"/>
+            <a:off x="777240" y="1777284"/>
+            <a:ext cx="7589520" cy="2824766"/>
           </a:xfrm>
           <a:prstGeom prst="rect">
             <a:avLst/>
@@ -6389,15 +6389,37 @@
               <a:buChar char="•"/>
             </a:pPr>
             <a:r>
-              <a:rPr sz="2000">
-                <a:solidFill>
-                  <a:srgbClr val="000000"/>
-                </a:solidFill>
-                <a:latin typeface="Microsoft YaHei"/>
-                <a:ea typeface="Microsoft YaHei"/>
-                <a:cs typeface="Microsoft YaHei"/>
-              </a:rPr>
-              <a:t>Codex 连接 Zotero</a:t>
+              <a:rPr sz="2000" dirty="0">
+                <a:solidFill>
+                  <a:srgbClr val="000000"/>
+                </a:solidFill>
+                <a:latin typeface="Microsoft YaHei"/>
+                <a:ea typeface="Microsoft YaHei"/>
+                <a:cs typeface="Microsoft YaHei"/>
+              </a:rPr>
+              <a:t>Codex </a:t>
+            </a:r>
+            <a:r>
+              <a:rPr sz="2000" dirty="0" err="1">
+                <a:solidFill>
+                  <a:srgbClr val="000000"/>
+                </a:solidFill>
+                <a:latin typeface="Microsoft YaHei"/>
+                <a:ea typeface="Microsoft YaHei"/>
+                <a:cs typeface="Microsoft YaHei"/>
+              </a:rPr>
+              <a:t>连接</a:t>
+            </a:r>
+            <a:r>
+              <a:rPr sz="2000" dirty="0">
+                <a:solidFill>
+                  <a:srgbClr val="000000"/>
+                </a:solidFill>
+                <a:latin typeface="Microsoft YaHei"/>
+                <a:ea typeface="Microsoft YaHei"/>
+                <a:cs typeface="Microsoft YaHei"/>
+              </a:rPr>
+              <a:t> Zotero</a:t>
             </a:r>
           </a:p>
           <a:p>
@@ -6409,16 +6431,79 @@
               <a:buChar char="•"/>
             </a:pPr>
             <a:r>
-              <a:rPr sz="2000">
-                <a:solidFill>
-                  <a:srgbClr val="000000"/>
-                </a:solidFill>
-                <a:latin typeface="Microsoft YaHei"/>
-                <a:ea typeface="Microsoft YaHei"/>
-                <a:cs typeface="Microsoft YaHei"/>
-              </a:rPr>
-              <a:t>在 Zotero 建立 collection 整理论文</a:t>
-            </a:r>
+              <a:rPr sz="2000" dirty="0" err="1">
+                <a:solidFill>
+                  <a:srgbClr val="000000"/>
+                </a:solidFill>
+                <a:latin typeface="Microsoft YaHei"/>
+                <a:ea typeface="Microsoft YaHei"/>
+                <a:cs typeface="Microsoft YaHei"/>
+              </a:rPr>
+              <a:t>在</a:t>
+            </a:r>
+            <a:r>
+              <a:rPr sz="2000" dirty="0">
+                <a:solidFill>
+                  <a:srgbClr val="000000"/>
+                </a:solidFill>
+                <a:latin typeface="Microsoft YaHei"/>
+                <a:ea typeface="Microsoft YaHei"/>
+                <a:cs typeface="Microsoft YaHei"/>
+              </a:rPr>
+              <a:t> Zotero </a:t>
+            </a:r>
+            <a:r>
+              <a:rPr sz="2000" dirty="0" err="1">
+                <a:solidFill>
+                  <a:srgbClr val="000000"/>
+                </a:solidFill>
+                <a:latin typeface="Microsoft YaHei"/>
+                <a:ea typeface="Microsoft YaHei"/>
+                <a:cs typeface="Microsoft YaHei"/>
+              </a:rPr>
+              <a:t>建立</a:t>
+            </a:r>
+            <a:r>
+              <a:rPr sz="2000" dirty="0">
+                <a:solidFill>
+                  <a:srgbClr val="000000"/>
+                </a:solidFill>
+                <a:latin typeface="Microsoft YaHei"/>
+                <a:ea typeface="Microsoft YaHei"/>
+                <a:cs typeface="Microsoft YaHei"/>
+              </a:rPr>
+              <a:t> collection </a:t>
+            </a:r>
+            <a:r>
+              <a:rPr sz="2000" dirty="0" err="1">
+                <a:solidFill>
+                  <a:srgbClr val="000000"/>
+                </a:solidFill>
+                <a:latin typeface="Microsoft YaHei"/>
+                <a:ea typeface="Microsoft YaHei"/>
+                <a:cs typeface="Microsoft YaHei"/>
+              </a:rPr>
+              <a:t>整理论文</a:t>
+            </a:r>
+            <a:r>
+              <a:rPr lang="zh-CN" altLang="en-US" sz="2000" dirty="0">
+                <a:solidFill>
+                  <a:srgbClr val="000000"/>
+                </a:solidFill>
+                <a:latin typeface="Microsoft YaHei"/>
+                <a:ea typeface="Microsoft YaHei"/>
+                <a:cs typeface="Microsoft YaHei"/>
+              </a:rPr>
+              <a:t>（浏览器下载示例）</a:t>
+            </a:r>
+            <a:endParaRPr sz="2000" dirty="0">
+              <a:solidFill>
+                <a:srgbClr val="000000"/>
+              </a:solidFill>
+              <a:latin typeface="Microsoft YaHei"/>
+              <a:ea typeface="Microsoft YaHei"/>
+              <a:cs typeface="Microsoft YaHei"/>
+            </a:endParaRPr>
           </a:p>
           <a:p>
             <a:pPr marL="190500" indent="-190500" algn="l">
@@ -6429,17 +6514,241 @@
               <a:buChar char="•"/>
             </a:pPr>
             <a:r>
-              <a:rPr sz="2000">
-                <a:solidFill>
-                  <a:srgbClr val="000000"/>
-                </a:solidFill>
-                <a:latin typeface="Microsoft YaHei"/>
-                <a:ea typeface="Microsoft YaHei"/>
-                <a:cs typeface="Microsoft YaHei"/>
-              </a:rPr>
-              <a:t>用 Codex 从 Zotero 读取特定论文（示例）</a:t>
-            </a:r>
-            <a:endParaRPr sz="2000"/>
+              <a:rPr sz="2000" dirty="0" err="1">
+                <a:solidFill>
+                  <a:srgbClr val="000000"/>
+                </a:solidFill>
+                <a:latin typeface="Microsoft YaHei"/>
+                <a:ea typeface="Microsoft YaHei"/>
+                <a:cs typeface="Microsoft YaHei"/>
+              </a:rPr>
+              <a:t>用</a:t>
+            </a:r>
+            <a:r>
+              <a:rPr sz="2000" dirty="0">
+                <a:solidFill>
+                  <a:srgbClr val="000000"/>
+                </a:solidFill>
+                <a:latin typeface="Microsoft YaHei"/>
+                <a:ea typeface="Microsoft YaHei"/>
+                <a:cs typeface="Microsoft YaHei"/>
+              </a:rPr>
+              <a:t> Codex </a:t>
+            </a:r>
+            <a:r>
+              <a:rPr sz="2000" dirty="0" err="1">
+                <a:solidFill>
+                  <a:srgbClr val="000000"/>
+                </a:solidFill>
+                <a:latin typeface="Microsoft YaHei"/>
+                <a:ea typeface="Microsoft YaHei"/>
+                <a:cs typeface="Microsoft YaHei"/>
+              </a:rPr>
+              <a:t>从</a:t>
+            </a:r>
+            <a:r>
+              <a:rPr sz="2000" dirty="0">
+                <a:solidFill>
+                  <a:srgbClr val="000000"/>
+                </a:solidFill>
+                <a:latin typeface="Microsoft YaHei"/>
+                <a:ea typeface="Microsoft YaHei"/>
+                <a:cs typeface="Microsoft YaHei"/>
+              </a:rPr>
+              <a:t> Zotero </a:t>
+            </a:r>
+            <a:r>
+              <a:rPr sz="2000" dirty="0" err="1">
+                <a:solidFill>
+                  <a:srgbClr val="000000"/>
+                </a:solidFill>
+                <a:latin typeface="Microsoft YaHei"/>
+                <a:ea typeface="Microsoft YaHei"/>
+                <a:cs typeface="Microsoft YaHei"/>
+              </a:rPr>
+              <a:t>读取特定论文（示例</a:t>
+            </a:r>
+            <a:r>
+              <a:rPr sz="2000" dirty="0">
+                <a:solidFill>
+                  <a:srgbClr val="000000"/>
+                </a:solidFill>
+                <a:latin typeface="Microsoft YaHei"/>
+                <a:ea typeface="Microsoft YaHei"/>
+                <a:cs typeface="Microsoft YaHei"/>
+              </a:rPr>
+              <a:t>）</a:t>
+            </a:r>
+            <a:endParaRPr lang="en-US" sz="2000" dirty="0">
+              <a:solidFill>
+                <a:srgbClr val="000000"/>
+              </a:solidFill>
+              <a:latin typeface="Microsoft YaHei"/>
+              <a:ea typeface="Microsoft YaHei"/>
+              <a:cs typeface="Microsoft YaHei"/>
+            </a:endParaRPr>
+          </a:p>
+          <a:p>
+            <a:pPr marL="190500" indent="-190500" algn="l">
+              <a:spcAft>
+                <a:spcPts val="1400"/>
+              </a:spcAft>
+              <a:buSzPct val="100000"/>
+              <a:buChar char="•"/>
+            </a:pPr>
+            <a:r>
+              <a:rPr lang="en-US" sz="2000" dirty="0" err="1">
+                <a:solidFill>
+                  <a:srgbClr val="000000"/>
+                </a:solidFill>
+                <a:latin typeface="Microsoft YaHei"/>
+                <a:ea typeface="Microsoft YaHei"/>
+              </a:rPr>
+              <a:t>用</a:t>
+            </a:r>
+            <a:r>
+              <a:rPr lang="zh-CN" altLang="en-US" sz="2000" dirty="0">
+                <a:solidFill>
+                  <a:srgbClr val="000000"/>
+                </a:solidFill>
+                <a:latin typeface="Microsoft YaHei"/>
+                <a:ea typeface="Microsoft YaHei"/>
+              </a:rPr>
+              <a:t> </a:t>
+            </a:r>
+            <a:r>
+              <a:rPr lang="en-US" altLang="zh-CN" sz="2000" dirty="0">
+                <a:solidFill>
+                  <a:srgbClr val="000000"/>
+                </a:solidFill>
+                <a:latin typeface="Microsoft YaHei"/>
+                <a:ea typeface="Microsoft YaHei"/>
+              </a:rPr>
+              <a:t>Latex </a:t>
+            </a:r>
+            <a:r>
+              <a:rPr lang="zh-CN" altLang="en-US" sz="2000" dirty="0">
+                <a:solidFill>
+                  <a:srgbClr val="000000"/>
+                </a:solidFill>
+                <a:latin typeface="Microsoft YaHei"/>
+                <a:ea typeface="Microsoft YaHei"/>
+              </a:rPr>
+              <a:t>写论文：</a:t>
+            </a:r>
+            <a:endParaRPr lang="en-US" altLang="zh-CN" sz="2000" dirty="0">
+              <a:solidFill>
+                <a:srgbClr val="000000"/>
+              </a:solidFill>
+              <a:latin typeface="Microsoft YaHei"/>
+              <a:ea typeface="Microsoft YaHei"/>
+            </a:endParaRPr>
+          </a:p>
+          <a:p>
+            <a:pPr marL="647700" lvl="1" indent="-190500">
+              <a:spcAft>
+                <a:spcPts val="1400"/>
+              </a:spcAft>
+              <a:buSzPct val="100000"/>
+              <a:buChar char="•"/>
+            </a:pPr>
+            <a:r>
+              <a:rPr lang="zh-CN" altLang="en-US" sz="2000" dirty="0">
+                <a:solidFill>
+                  <a:srgbClr val="000000"/>
+                </a:solidFill>
+                <a:latin typeface="Microsoft YaHei"/>
+                <a:ea typeface="Microsoft YaHei"/>
+              </a:rPr>
+              <a:t>方便管理不同版本，方便 </a:t>
+            </a:r>
+            <a:r>
+              <a:rPr lang="en-US" altLang="zh-CN" sz="2000" dirty="0">
+                <a:solidFill>
+                  <a:srgbClr val="000000"/>
+                </a:solidFill>
+                <a:latin typeface="Microsoft YaHei"/>
+                <a:ea typeface="Microsoft YaHei"/>
+              </a:rPr>
+              <a:t>AI</a:t>
+            </a:r>
+            <a:r>
+              <a:rPr lang="zh-CN" altLang="en-US" sz="2000" dirty="0">
+                <a:solidFill>
+                  <a:srgbClr val="000000"/>
+                </a:solidFill>
+                <a:latin typeface="Microsoft YaHei"/>
+                <a:ea typeface="Microsoft YaHei"/>
+              </a:rPr>
+              <a:t> 读写</a:t>
+            </a:r>
+            <a:endParaRPr lang="en-US" altLang="zh-CN" sz="2000" dirty="0">
+              <a:solidFill>
+                <a:srgbClr val="000000"/>
+              </a:solidFill>
+              <a:latin typeface="Microsoft YaHei"/>
+              <a:ea typeface="Microsoft YaHei"/>
+            </a:endParaRPr>
+          </a:p>
+          <a:p>
+            <a:pPr marL="647700" lvl="1" indent="-190500">
+              <a:spcAft>
+                <a:spcPts val="1400"/>
+              </a:spcAft>
+              <a:buSzPct val="100000"/>
+              <a:buChar char="•"/>
+            </a:pPr>
+            <a:r>
+              <a:rPr lang="zh-CN" altLang="en-US" sz="2000" dirty="0">
+                <a:solidFill>
+                  <a:srgbClr val="000000"/>
+                </a:solidFill>
+                <a:latin typeface="Microsoft YaHei"/>
+                <a:ea typeface="Microsoft YaHei"/>
+              </a:rPr>
+              <a:t>配合 </a:t>
+            </a:r>
+            <a:r>
+              <a:rPr lang="en-US" altLang="zh-CN" sz="2000" dirty="0">
+                <a:solidFill>
+                  <a:srgbClr val="000000"/>
+                </a:solidFill>
+                <a:latin typeface="Microsoft YaHei"/>
+                <a:ea typeface="Microsoft YaHei"/>
+              </a:rPr>
+              <a:t>Zotero</a:t>
+            </a:r>
+            <a:r>
+              <a:rPr lang="zh-CN" altLang="en-US" sz="2000" dirty="0">
+                <a:solidFill>
+                  <a:srgbClr val="000000"/>
+                </a:solidFill>
+                <a:latin typeface="Microsoft YaHei"/>
+                <a:ea typeface="Microsoft YaHei"/>
+              </a:rPr>
+              <a:t>管理 </a:t>
+            </a:r>
+            <a:r>
+              <a:rPr lang="en-US" altLang="zh-CN" sz="2000" dirty="0">
+                <a:solidFill>
+                  <a:srgbClr val="000000"/>
+                </a:solidFill>
+                <a:latin typeface="Microsoft YaHei"/>
+                <a:ea typeface="Microsoft YaHei"/>
+              </a:rPr>
+              <a:t>References</a:t>
+            </a:r>
+            <a:r>
+              <a:rPr lang="zh-CN" altLang="en-US" sz="2000" dirty="0">
+                <a:solidFill>
+                  <a:srgbClr val="000000"/>
+                </a:solidFill>
+                <a:latin typeface="Microsoft YaHei"/>
+                <a:ea typeface="Microsoft YaHei"/>
+              </a:rPr>
+              <a:t>（模板示例） </a:t>
+            </a:r>
+            <a:endParaRPr sz="2000" dirty="0"/>
           </a:p>
         </p:txBody>
       </p:sp>
@@ -6945,16 +7254,112 @@
               <a:buChar char="•"/>
             </a:pPr>
             <a:r>
-              <a:rPr sz="2000">
-                <a:solidFill>
-                  <a:srgbClr val="000000"/>
-                </a:solidFill>
-                <a:latin typeface="Microsoft YaHei"/>
-                <a:ea typeface="Microsoft YaHei"/>
-                <a:cs typeface="Microsoft YaHei"/>
-              </a:rPr>
-              <a:t>需谨慎使用 AI 寻找 research idea，优先与老师、同门讨论，在确定明确的研究方向后，可与 AI 讨论技术细节</a:t>
-            </a:r>
+              <a:rPr sz="2000" dirty="0" err="1">
+                <a:solidFill>
+                  <a:srgbClr val="000000"/>
+                </a:solidFill>
+                <a:latin typeface="Microsoft YaHei"/>
+                <a:ea typeface="Microsoft YaHei"/>
+                <a:cs typeface="Microsoft YaHei"/>
+              </a:rPr>
+              <a:t>需谨慎使用</a:t>
+            </a:r>
+            <a:r>
+              <a:rPr sz="2000" dirty="0">
+                <a:solidFill>
+                  <a:srgbClr val="000000"/>
+                </a:solidFill>
+                <a:latin typeface="Microsoft YaHei"/>
+                <a:ea typeface="Microsoft YaHei"/>
+                <a:cs typeface="Microsoft YaHei"/>
+              </a:rPr>
+              <a:t> AI </a:t>
+            </a:r>
+            <a:r>
+              <a:rPr sz="2000" dirty="0" err="1">
+                <a:solidFill>
+                  <a:srgbClr val="000000"/>
+                </a:solidFill>
+                <a:latin typeface="Microsoft YaHei"/>
+                <a:ea typeface="Microsoft YaHei"/>
+                <a:cs typeface="Microsoft YaHei"/>
+              </a:rPr>
+              <a:t>寻找</a:t>
+            </a:r>
+            <a:r>
+              <a:rPr sz="2000" dirty="0">
+                <a:solidFill>
+                  <a:srgbClr val="000000"/>
+                </a:solidFill>
+                <a:latin typeface="Microsoft YaHei"/>
+                <a:ea typeface="Microsoft YaHei"/>
+                <a:cs typeface="Microsoft YaHei"/>
+              </a:rPr>
+              <a:t> research </a:t>
+            </a:r>
+            <a:r>
+              <a:rPr sz="2000" dirty="0" err="1">
+                <a:solidFill>
+                  <a:srgbClr val="000000"/>
+                </a:solidFill>
+                <a:latin typeface="Microsoft YaHei"/>
+                <a:ea typeface="Microsoft YaHei"/>
+                <a:cs typeface="Microsoft YaHei"/>
+              </a:rPr>
+              <a:t>idea，优先与老师、同门讨论，在</a:t>
+            </a:r>
+            <a:r>
+              <a:rPr lang="zh-CN" altLang="en-US" sz="2000" dirty="0">
+                <a:solidFill>
+                  <a:srgbClr val="000000"/>
+                </a:solidFill>
+                <a:latin typeface="Microsoft YaHei"/>
+                <a:ea typeface="Microsoft YaHei"/>
+                <a:cs typeface="Microsoft YaHei"/>
+              </a:rPr>
+              <a:t>有</a:t>
+            </a:r>
+            <a:r>
+              <a:rPr sz="2000" dirty="0" err="1">
+                <a:solidFill>
+                  <a:srgbClr val="000000"/>
+                </a:solidFill>
+                <a:latin typeface="Microsoft YaHei"/>
+                <a:ea typeface="Microsoft YaHei"/>
+                <a:cs typeface="Microsoft YaHei"/>
+              </a:rPr>
+              <a:t>明确的研究方向后，可与</a:t>
+            </a:r>
+            <a:r>
+              <a:rPr sz="2000" dirty="0">
+                <a:solidFill>
+                  <a:srgbClr val="000000"/>
+                </a:solidFill>
+                <a:latin typeface="Microsoft YaHei"/>
+                <a:ea typeface="Microsoft YaHei"/>
+                <a:cs typeface="Microsoft YaHei"/>
+              </a:rPr>
+              <a:t> AI </a:t>
+            </a:r>
+            <a:r>
+              <a:rPr sz="2000" dirty="0" err="1">
+                <a:solidFill>
+                  <a:srgbClr val="000000"/>
+                </a:solidFill>
+                <a:latin typeface="Microsoft YaHei"/>
+                <a:ea typeface="Microsoft YaHei"/>
+                <a:cs typeface="Microsoft YaHei"/>
+              </a:rPr>
+              <a:t>讨论技术细节</a:t>
+            </a:r>
+            <a:endParaRPr sz="2000" dirty="0">
+              <a:solidFill>
+                <a:srgbClr val="000000"/>
+              </a:solidFill>
+              <a:latin typeface="Microsoft YaHei"/>
+              <a:ea typeface="Microsoft YaHei"/>
+              <a:cs typeface="Microsoft YaHei"/>
+            </a:endParaRPr>
           </a:p>
           <a:p>
             <a:pPr marL="190500" indent="-190500">
@@ -6965,7 +7370,7 @@
               <a:buChar char="•"/>
             </a:pPr>
             <a:r>
-              <a:rPr sz="2000">
+              <a:rPr sz="2000" dirty="0">
                 <a:solidFill>
                   <a:srgbClr val="000000"/>
                 </a:solidFill>
@@ -6976,7 +7381,7 @@
               <a:t>ARS (</a:t>
             </a:r>
             <a:r>
-              <a:rPr sz="2000">
+              <a:rPr sz="2000" dirty="0">
                 <a:solidFill>
                   <a:srgbClr val="000000"/>
                 </a:solidFill>
@@ -6988,15 +7393,37 @@
               <a:t>https://github.com/Imbad0202/academic-research-skills-codex/tree/main</a:t>
             </a:r>
             <a:r>
-              <a:rPr sz="2000">
-                <a:solidFill>
-                  <a:srgbClr val="000000"/>
-                </a:solidFill>
-                <a:latin typeface="Microsoft YaHei"/>
-                <a:ea typeface="Microsoft YaHei"/>
-                <a:cs typeface="Microsoft YaHei"/>
-              </a:rPr>
-              <a:t>): ‘deep-research/socratic’ </a:t>
+              <a:rPr sz="2000" dirty="0">
+                <a:solidFill>
+                  <a:srgbClr val="000000"/>
+                </a:solidFill>
+                <a:latin typeface="Microsoft YaHei"/>
+                <a:ea typeface="Microsoft YaHei"/>
+                <a:cs typeface="Microsoft YaHei"/>
+              </a:rPr>
+              <a:t>): ‘deep-research/</a:t>
+            </a:r>
+            <a:r>
+              <a:rPr sz="2000" dirty="0" err="1">
+                <a:solidFill>
+                  <a:srgbClr val="000000"/>
+                </a:solidFill>
+                <a:latin typeface="Microsoft YaHei"/>
+                <a:ea typeface="Microsoft YaHei"/>
+                <a:cs typeface="Microsoft YaHei"/>
+              </a:rPr>
+              <a:t>socratic</a:t>
+            </a:r>
+            <a:r>
+              <a:rPr sz="2000" dirty="0">
+                <a:solidFill>
+                  <a:srgbClr val="000000"/>
+                </a:solidFill>
+                <a:latin typeface="Microsoft YaHei"/>
+                <a:ea typeface="Microsoft YaHei"/>
+                <a:cs typeface="Microsoft YaHei"/>
+              </a:rPr>
+              <a:t>’ </a:t>
             </a:r>
           </a:p>
           <a:p>
@@ -7008,7 +7435,7 @@
               <a:buChar char="•"/>
             </a:pPr>
             <a:r>
-              <a:rPr sz="2000">
+              <a:rPr sz="2000" dirty="0">
                 <a:solidFill>
                   <a:srgbClr val="000000"/>
                 </a:solidFill>
@@ -7019,7 +7446,7 @@
               <a:t>Good question (</a:t>
             </a:r>
             <a:r>
-              <a:rPr sz="2000">
+              <a:rPr sz="2000" dirty="0">
                 <a:solidFill>
                   <a:srgbClr val="000000"/>
                 </a:solidFill>
@@ -7031,7 +7458,7 @@
               <a:t>https://github.com/Rimagination/good-question</a:t>
             </a:r>
             <a:r>
-              <a:rPr sz="2000">
+              <a:rPr sz="2000" dirty="0">
                 <a:solidFill>
                   <a:srgbClr val="000000"/>
                 </a:solidFill>
@@ -7051,7 +7478,7 @@
               <a:buChar char="•"/>
             </a:pPr>
             <a:r>
-              <a:rPr sz="2000">
+              <a:rPr sz="2000" dirty="0" err="1">
                 <a:solidFill>
                   <a:srgbClr val="000000"/>
                 </a:solidFill>
@@ -7061,7 +7488,7 @@
               </a:rPr>
               <a:t>两个示例</a:t>
             </a:r>
-            <a:endParaRPr sz="2000"/>
+            <a:endParaRPr sz="2000" dirty="0"/>
           </a:p>
         </p:txBody>
       </p:sp>
@@ -7677,7 +8104,7 @@
               <a:buNone/>
             </a:pPr>
             <a:r>
-              <a:rPr sz="2000" b="1">
+              <a:rPr sz="2000" b="1" dirty="0">
                 <a:solidFill>
                   <a:srgbClr val="2E75B6"/>
                 </a:solidFill>
@@ -7688,7 +8115,7 @@
               <a:t>4.3. </a:t>
             </a:r>
             <a:r>
-              <a:rPr sz="2000">
+              <a:rPr sz="2000" dirty="0" err="1">
                 <a:solidFill>
                   <a:srgbClr val="2D2D2D"/>
                 </a:solidFill>
@@ -7698,7 +8125,7 @@
               </a:rPr>
               <a:t>上下文管理</a:t>
             </a:r>
-            <a:endParaRPr sz="2000"/>
+            <a:endParaRPr sz="2000" dirty="0"/>
           </a:p>
         </p:txBody>
       </p:sp>
@@ -7734,7 +8161,7 @@
               <a:buNone/>
             </a:pPr>
             <a:r>
-              <a:rPr sz="2000" b="1">
+              <a:rPr sz="2000" b="1" dirty="0">
                 <a:solidFill>
                   <a:srgbClr val="2E75B6"/>
                 </a:solidFill>
@@ -7745,7 +8172,7 @@
               <a:t>4.4. </a:t>
             </a:r>
             <a:r>
-              <a:rPr sz="2000">
+              <a:rPr lang="zh-CN" altLang="en-US" sz="2000" dirty="0">
                 <a:solidFill>
                   <a:srgbClr val="2D2D2D"/>
                 </a:solidFill>
@@ -7753,9 +8180,9 @@
                 <a:ea typeface="Microsoft YaHei"/>
                 <a:cs typeface="Microsoft YaHei"/>
               </a:rPr>
-              <a:t>代码规范</a:t>
-            </a:r>
-            <a:endParaRPr sz="2000"/>
+              <a:t>数据管理</a:t>
+            </a:r>
+            <a:endParaRPr sz="2000" dirty="0"/>
           </a:p>
         </p:txBody>
       </p:sp>
@@ -7791,7 +8218,7 @@
               <a:buNone/>
             </a:pPr>
             <a:r>
-              <a:rPr sz="2000" b="1">
+              <a:rPr sz="2000" b="1" dirty="0">
                 <a:solidFill>
                   <a:srgbClr val="2E75B6"/>
                 </a:solidFill>
@@ -7802,7 +8229,7 @@
               <a:t>4.5. </a:t>
             </a:r>
             <a:r>
-              <a:rPr sz="2000">
+              <a:rPr lang="zh-CN" altLang="en-US" sz="2000" dirty="0">
                 <a:solidFill>
                   <a:srgbClr val="2D2D2D"/>
                 </a:solidFill>
@@ -7810,9 +8237,9 @@
                 <a:ea typeface="Microsoft YaHei"/>
                 <a:cs typeface="Microsoft YaHei"/>
               </a:rPr>
-              <a:t>数据管理</a:t>
-            </a:r>
-            <a:endParaRPr sz="2000"/>
+              <a:t>代码规范</a:t>
+            </a:r>
+            <a:endParaRPr sz="2000" dirty="0"/>
           </a:p>
         </p:txBody>
       </p:sp>
@@ -8432,7 +8859,7 @@
               <a:buChar char="•"/>
             </a:pPr>
             <a:r>
-              <a:rPr sz="2000">
+              <a:rPr sz="2000" dirty="0" err="1">
                 <a:solidFill>
                   <a:srgbClr val="000000"/>
                 </a:solidFill>
@@ -8442,6 +8869,14 @@
               </a:rPr>
               <a:t>一个项目对应一个文件夹，在该文件夹内进行所有工作</a:t>
             </a:r>
+            <a:endParaRPr sz="2000" dirty="0">
+              <a:solidFill>
+                <a:srgbClr val="000000"/>
+              </a:solidFill>
+              <a:latin typeface="Microsoft YaHei"/>
+              <a:ea typeface="Microsoft YaHei"/>
+              <a:cs typeface="Microsoft YaHei"/>
+            </a:endParaRPr>
           </a:p>
           <a:p>
             <a:pPr marL="190500" indent="-190500">
@@ -8452,18 +8887,51 @@
               <a:buChar char="•"/>
             </a:pPr>
             <a:r>
-              <a:rPr sz="2000">
-                <a:solidFill>
-                  <a:srgbClr val="000000"/>
-                </a:solidFill>
-                <a:latin typeface="Microsoft YaHei"/>
-                <a:ea typeface="Microsoft YaHei"/>
-                <a:cs typeface="Microsoft YaHei"/>
-              </a:rPr>
-              <a:t>用 uv (</a:t>
-            </a:r>
-            <a:r>
-              <a:rPr sz="2000">
+              <a:rPr sz="2000" dirty="0" err="1">
+                <a:solidFill>
+                  <a:srgbClr val="000000"/>
+                </a:solidFill>
+                <a:latin typeface="Microsoft YaHei"/>
+                <a:ea typeface="Microsoft YaHei"/>
+                <a:cs typeface="Microsoft YaHei"/>
+              </a:rPr>
+              <a:t>用</a:t>
+            </a:r>
+            <a:r>
+              <a:rPr sz="2000" dirty="0">
+                <a:solidFill>
+                  <a:srgbClr val="000000"/>
+                </a:solidFill>
+                <a:latin typeface="Microsoft YaHei"/>
+                <a:ea typeface="Microsoft YaHei"/>
+                <a:cs typeface="Microsoft YaHei"/>
+              </a:rPr>
+              <a:t> </a:t>
+            </a:r>
+            <a:r>
+              <a:rPr sz="2000" dirty="0" err="1">
+                <a:solidFill>
+                  <a:srgbClr val="000000"/>
+                </a:solidFill>
+                <a:latin typeface="Microsoft YaHei"/>
+                <a:ea typeface="Microsoft YaHei"/>
+                <a:cs typeface="Microsoft YaHei"/>
+              </a:rPr>
+              <a:t>uv</a:t>
+            </a:r>
+            <a:r>
+              <a:rPr sz="2000" dirty="0">
+                <a:solidFill>
+                  <a:srgbClr val="000000"/>
+                </a:solidFill>
+                <a:latin typeface="Microsoft YaHei"/>
+                <a:ea typeface="Microsoft YaHei"/>
+                <a:cs typeface="Microsoft YaHei"/>
+              </a:rPr>
+              <a:t> (</a:t>
+            </a:r>
+            <a:r>
+              <a:rPr sz="2000" dirty="0">
                 <a:solidFill>
                   <a:srgbClr val="000000"/>
                 </a:solidFill>
@@ -8475,15 +8943,147 @@
               <a:t>https://uv.oaix.tech</a:t>
             </a:r>
             <a:r>
-              <a:rPr sz="2000">
-                <a:solidFill>
-                  <a:srgbClr val="000000"/>
-                </a:solidFill>
-                <a:latin typeface="Microsoft YaHei"/>
-                <a:ea typeface="Microsoft YaHei"/>
-                <a:cs typeface="Microsoft YaHei"/>
-              </a:rPr>
-              <a:t>) 管理 python开发环境，掌握 ’init/sync/add/source’ 即可（新目录操作示例）</a:t>
+              <a:rPr sz="2000" dirty="0">
+                <a:solidFill>
+                  <a:srgbClr val="000000"/>
+                </a:solidFill>
+                <a:latin typeface="Microsoft YaHei"/>
+                <a:ea typeface="Microsoft YaHei"/>
+                <a:cs typeface="Microsoft YaHei"/>
+              </a:rPr>
+              <a:t>) </a:t>
+            </a:r>
+            <a:r>
+              <a:rPr sz="2000" dirty="0" err="1">
+                <a:solidFill>
+                  <a:srgbClr val="000000"/>
+                </a:solidFill>
+                <a:latin typeface="Microsoft YaHei"/>
+                <a:ea typeface="Microsoft YaHei"/>
+                <a:cs typeface="Microsoft YaHei"/>
+              </a:rPr>
+              <a:t>管理</a:t>
+            </a:r>
+            <a:r>
+              <a:rPr sz="2000" dirty="0">
+                <a:solidFill>
+                  <a:srgbClr val="000000"/>
+                </a:solidFill>
+                <a:latin typeface="Microsoft YaHei"/>
+                <a:ea typeface="Microsoft YaHei"/>
+                <a:cs typeface="Microsoft YaHei"/>
+              </a:rPr>
+              <a:t> </a:t>
+            </a:r>
+            <a:r>
+              <a:rPr sz="2000" dirty="0" err="1">
+                <a:solidFill>
+                  <a:srgbClr val="000000"/>
+                </a:solidFill>
+                <a:latin typeface="Microsoft YaHei"/>
+                <a:ea typeface="Microsoft YaHei"/>
+                <a:cs typeface="Microsoft YaHei"/>
+              </a:rPr>
+              <a:t>python开发环境，掌握</a:t>
+            </a:r>
+            <a:r>
+              <a:rPr sz="2000" dirty="0">
+                <a:solidFill>
+                  <a:srgbClr val="000000"/>
+                </a:solidFill>
+                <a:latin typeface="Microsoft YaHei"/>
+                <a:ea typeface="Microsoft YaHei"/>
+                <a:cs typeface="Microsoft YaHei"/>
+              </a:rPr>
+              <a:t> ’</a:t>
+            </a:r>
+            <a:r>
+              <a:rPr sz="2000" dirty="0" err="1">
+                <a:solidFill>
+                  <a:srgbClr val="000000"/>
+                </a:solidFill>
+                <a:latin typeface="Microsoft YaHei"/>
+                <a:ea typeface="Microsoft YaHei"/>
+                <a:cs typeface="Microsoft YaHei"/>
+              </a:rPr>
+              <a:t>init</a:t>
+            </a:r>
+            <a:r>
+              <a:rPr sz="2000" dirty="0">
+                <a:solidFill>
+                  <a:srgbClr val="000000"/>
+                </a:solidFill>
+                <a:latin typeface="Microsoft YaHei"/>
+                <a:ea typeface="Microsoft YaHei"/>
+                <a:cs typeface="Microsoft YaHei"/>
+              </a:rPr>
+              <a:t>/</a:t>
+            </a:r>
+            <a:r>
+              <a:rPr lang="en-GB" altLang="zh-CN" sz="2000" dirty="0">
+                <a:solidFill>
+                  <a:srgbClr val="000000"/>
+                </a:solidFill>
+                <a:latin typeface="Microsoft YaHei"/>
+                <a:ea typeface="Microsoft YaHei"/>
+                <a:cs typeface="Microsoft YaHei"/>
+              </a:rPr>
+              <a:t>add</a:t>
+            </a:r>
+            <a:r>
+              <a:rPr lang="en-US" altLang="zh-CN" sz="2000" dirty="0">
+                <a:solidFill>
+                  <a:srgbClr val="000000"/>
+                </a:solidFill>
+                <a:latin typeface="Microsoft YaHei"/>
+                <a:ea typeface="Microsoft YaHei"/>
+                <a:cs typeface="Microsoft YaHei"/>
+              </a:rPr>
+              <a:t>/</a:t>
+            </a:r>
+            <a:r>
+              <a:rPr sz="2000" dirty="0">
+                <a:solidFill>
+                  <a:srgbClr val="000000"/>
+                </a:solidFill>
+                <a:latin typeface="Microsoft YaHei"/>
+                <a:ea typeface="Microsoft YaHei"/>
+                <a:cs typeface="Microsoft YaHei"/>
+              </a:rPr>
+              <a:t>sync/source’ </a:t>
+            </a:r>
+            <a:r>
+              <a:rPr sz="2000" dirty="0" err="1">
+                <a:solidFill>
+                  <a:srgbClr val="000000"/>
+                </a:solidFill>
+                <a:latin typeface="Microsoft YaHei"/>
+                <a:ea typeface="Microsoft YaHei"/>
+                <a:cs typeface="Microsoft YaHei"/>
+              </a:rPr>
+              <a:t>即可（新目录操作</a:t>
+            </a:r>
+            <a:r>
+              <a:rPr lang="en-US" sz="2000" dirty="0" err="1">
+                <a:solidFill>
+                  <a:srgbClr val="000000"/>
+                </a:solidFill>
+                <a:latin typeface="Microsoft YaHei"/>
+                <a:ea typeface="Microsoft YaHei"/>
+                <a:cs typeface="Microsoft YaHei"/>
+              </a:rPr>
+              <a:t>示例</a:t>
+            </a:r>
+            <a:r>
+              <a:rPr sz="2000" dirty="0">
+                <a:solidFill>
+                  <a:srgbClr val="000000"/>
+                </a:solidFill>
+                <a:latin typeface="Microsoft YaHei"/>
+                <a:ea typeface="Microsoft YaHei"/>
+                <a:cs typeface="Microsoft YaHei"/>
+              </a:rPr>
+              <a:t>）</a:t>
             </a:r>
           </a:p>
           <a:p>
@@ -8495,16 +9095,68 @@
               <a:buChar char="•"/>
             </a:pPr>
             <a:r>
-              <a:rPr sz="2000">
-                <a:solidFill>
-                  <a:srgbClr val="000000"/>
-                </a:solidFill>
-                <a:latin typeface="Microsoft YaHei"/>
-                <a:ea typeface="Microsoft YaHei"/>
-                <a:cs typeface="Microsoft YaHei"/>
-              </a:rPr>
-              <a:t>维护 pyproject.toml 文件</a:t>
-            </a:r>
+              <a:rPr lang="en-US" sz="2000" dirty="0" err="1">
+                <a:solidFill>
+                  <a:srgbClr val="000000"/>
+                </a:solidFill>
+                <a:latin typeface="Microsoft YaHei"/>
+                <a:ea typeface="Microsoft YaHei"/>
+                <a:cs typeface="Microsoft YaHei"/>
+              </a:rPr>
+              <a:t>介绍</a:t>
+            </a:r>
+            <a:r>
+              <a:rPr sz="2000" dirty="0">
+                <a:solidFill>
+                  <a:srgbClr val="000000"/>
+                </a:solidFill>
+                <a:latin typeface="Microsoft YaHei"/>
+                <a:ea typeface="Microsoft YaHei"/>
+                <a:cs typeface="Microsoft YaHei"/>
+              </a:rPr>
+              <a:t> </a:t>
+            </a:r>
+            <a:r>
+              <a:rPr sz="2000" dirty="0" err="1">
+                <a:solidFill>
+                  <a:srgbClr val="000000"/>
+                </a:solidFill>
+                <a:latin typeface="Microsoft YaHei"/>
+                <a:ea typeface="Microsoft YaHei"/>
+                <a:cs typeface="Microsoft YaHei"/>
+              </a:rPr>
+              <a:t>pyproject.toml</a:t>
+            </a:r>
+            <a:r>
+              <a:rPr sz="2000" dirty="0">
+                <a:solidFill>
+                  <a:srgbClr val="000000"/>
+                </a:solidFill>
+                <a:latin typeface="Microsoft YaHei"/>
+                <a:ea typeface="Microsoft YaHei"/>
+                <a:cs typeface="Microsoft YaHei"/>
+              </a:rPr>
+              <a:t> </a:t>
+            </a:r>
+            <a:r>
+              <a:rPr sz="2000" dirty="0" err="1">
+                <a:solidFill>
+                  <a:srgbClr val="000000"/>
+                </a:solidFill>
+                <a:latin typeface="Microsoft YaHei"/>
+                <a:ea typeface="Microsoft YaHei"/>
+                <a:cs typeface="Microsoft YaHei"/>
+              </a:rPr>
+              <a:t>文件</a:t>
+            </a:r>
+            <a:endParaRPr sz="2000" dirty="0">
+              <a:solidFill>
+                <a:srgbClr val="000000"/>
+              </a:solidFill>
+              <a:latin typeface="Microsoft YaHei"/>
+              <a:ea typeface="Microsoft YaHei"/>
+              <a:cs typeface="Microsoft YaHei"/>
+            </a:endParaRPr>
           </a:p>
           <a:p>
             <a:pPr marL="190500" indent="-190500">
@@ -8515,16 +9167,57 @@
               <a:buChar char="•"/>
             </a:pPr>
             <a:r>
-              <a:rPr sz="2000">
-                <a:solidFill>
-                  <a:srgbClr val="000000"/>
-                </a:solidFill>
-                <a:latin typeface="Microsoft YaHei"/>
-                <a:ea typeface="Microsoft YaHei"/>
-                <a:cs typeface="Microsoft YaHei"/>
-              </a:rPr>
-              <a:t>使用 git 管理项目变动和版本 </a:t>
-            </a:r>
+              <a:rPr sz="2000" dirty="0" err="1">
+                <a:solidFill>
+                  <a:srgbClr val="000000"/>
+                </a:solidFill>
+                <a:latin typeface="Microsoft YaHei"/>
+                <a:ea typeface="Microsoft YaHei"/>
+                <a:cs typeface="Microsoft YaHei"/>
+              </a:rPr>
+              <a:t>使用</a:t>
+            </a:r>
+            <a:r>
+              <a:rPr sz="2000" dirty="0">
+                <a:solidFill>
+                  <a:srgbClr val="000000"/>
+                </a:solidFill>
+                <a:latin typeface="Microsoft YaHei"/>
+                <a:ea typeface="Microsoft YaHei"/>
+                <a:cs typeface="Microsoft YaHei"/>
+              </a:rPr>
+              <a:t> git </a:t>
+            </a:r>
+            <a:r>
+              <a:rPr sz="2000" dirty="0" err="1">
+                <a:solidFill>
+                  <a:srgbClr val="000000"/>
+                </a:solidFill>
+                <a:latin typeface="Microsoft YaHei"/>
+                <a:ea typeface="Microsoft YaHei"/>
+                <a:cs typeface="Microsoft YaHei"/>
+              </a:rPr>
+              <a:t>管理项目变动和版本</a:t>
+            </a:r>
+            <a:r>
+              <a:rPr lang="zh-CN" altLang="en-US" sz="2000" dirty="0">
+                <a:solidFill>
+                  <a:srgbClr val="000000"/>
+                </a:solidFill>
+                <a:latin typeface="Microsoft YaHei"/>
+                <a:ea typeface="Microsoft YaHei"/>
+                <a:cs typeface="Microsoft YaHei"/>
+              </a:rPr>
+              <a:t>（恢复环境示例）</a:t>
+            </a:r>
+            <a:endParaRPr sz="2000" dirty="0">
+              <a:solidFill>
+                <a:srgbClr val="000000"/>
+              </a:solidFill>
+              <a:latin typeface="Microsoft YaHei"/>
+              <a:ea typeface="Microsoft YaHei"/>
+              <a:cs typeface="Microsoft YaHei"/>
+            </a:endParaRPr>
           </a:p>
           <a:p>
             <a:pPr marL="190500" indent="-190500">
@@ -8535,16 +9228,46 @@
               <a:buChar char="•"/>
             </a:pPr>
             <a:r>
-              <a:rPr sz="2000">
-                <a:solidFill>
-                  <a:srgbClr val="000000"/>
-                </a:solidFill>
-                <a:latin typeface="Microsoft YaHei"/>
-                <a:ea typeface="Microsoft YaHei"/>
-                <a:cs typeface="Microsoft YaHei"/>
-              </a:rPr>
-              <a:t>维护.gitignore 文件</a:t>
-            </a:r>
+              <a:rPr sz="2000" dirty="0" err="1">
+                <a:solidFill>
+                  <a:srgbClr val="000000"/>
+                </a:solidFill>
+                <a:latin typeface="Microsoft YaHei"/>
+                <a:ea typeface="Microsoft YaHei"/>
+                <a:cs typeface="Microsoft YaHei"/>
+              </a:rPr>
+              <a:t>维护.gitignore</a:t>
+            </a:r>
+            <a:r>
+              <a:rPr sz="2000" dirty="0">
+                <a:solidFill>
+                  <a:srgbClr val="000000"/>
+                </a:solidFill>
+                <a:latin typeface="Microsoft YaHei"/>
+                <a:ea typeface="Microsoft YaHei"/>
+                <a:cs typeface="Microsoft YaHei"/>
+              </a:rPr>
+              <a:t> </a:t>
+            </a:r>
+            <a:r>
+              <a:rPr sz="2000" dirty="0" err="1">
+                <a:solidFill>
+                  <a:srgbClr val="000000"/>
+                </a:solidFill>
+                <a:latin typeface="Microsoft YaHei"/>
+                <a:ea typeface="Microsoft YaHei"/>
+                <a:cs typeface="Microsoft YaHei"/>
+              </a:rPr>
+              <a:t>文件</a:t>
+            </a:r>
+            <a:endParaRPr sz="2000" dirty="0">
+              <a:solidFill>
+                <a:srgbClr val="000000"/>
+              </a:solidFill>
+              <a:latin typeface="Microsoft YaHei"/>
+              <a:ea typeface="Microsoft YaHei"/>
+              <a:cs typeface="Microsoft YaHei"/>
+            </a:endParaRPr>
           </a:p>
         </p:txBody>
       </p:sp>
@@ -8988,8 +9711,8 @@
         </p:nvSpPr>
         <p:spPr>
           <a:xfrm>
-            <a:off x="738603" y="1107578"/>
-            <a:ext cx="4288450" cy="3734878"/>
+            <a:off x="738602" y="1107578"/>
+            <a:ext cx="4455697" cy="3734878"/>
           </a:xfrm>
           <a:prstGeom prst="rect">
             <a:avLst/>
@@ -9000,7 +9723,7 @@
           <a:bodyPr wrap="square" anchor="t"/>
           <a:lstStyle/>
           <a:p>
-            <a:pPr marL="190500" indent="-190500" algn="l">
+            <a:pPr marL="190500" indent="-190500" algn="just">
               <a:spcAft>
                 <a:spcPts val="1400"/>
               </a:spcAft>
@@ -9008,19 +9731,49 @@
               <a:buChar char="•"/>
             </a:pPr>
             <a:r>
-              <a:rPr sz="2000">
-                <a:solidFill>
-                  <a:srgbClr val="000000"/>
-                </a:solidFill>
-                <a:latin typeface="Microsoft YaHei"/>
-                <a:ea typeface="Microsoft YaHei"/>
-                <a:cs typeface="Microsoft YaHei"/>
-              </a:rPr>
-              <a:t>以 AEB 项目为示例</a:t>
-            </a:r>
-          </a:p>
-          <a:p>
-            <a:pPr marL="190500" indent="-190500">
+              <a:rPr lang="en-US" sz="2000" dirty="0">
+                <a:solidFill>
+                  <a:srgbClr val="000000"/>
+                </a:solidFill>
+                <a:latin typeface="Microsoft YaHei"/>
+                <a:ea typeface="Microsoft YaHei"/>
+                <a:cs typeface="Microsoft YaHei"/>
+              </a:rPr>
+              <a:t>PVI</a:t>
+            </a:r>
+            <a:r>
+              <a:rPr sz="2000" dirty="0">
+                <a:solidFill>
+                  <a:srgbClr val="000000"/>
+                </a:solidFill>
+                <a:latin typeface="Microsoft YaHei"/>
+                <a:ea typeface="Microsoft YaHei"/>
+                <a:cs typeface="Microsoft YaHei"/>
+              </a:rPr>
+              <a:t> </a:t>
+            </a:r>
+            <a:r>
+              <a:rPr sz="2000" dirty="0" err="1">
+                <a:solidFill>
+                  <a:srgbClr val="000000"/>
+                </a:solidFill>
+                <a:latin typeface="Microsoft YaHei"/>
+                <a:ea typeface="Microsoft YaHei"/>
+                <a:cs typeface="Microsoft YaHei"/>
+              </a:rPr>
+              <a:t>项目示例</a:t>
+            </a:r>
+            <a:endParaRPr sz="2000" dirty="0">
+              <a:solidFill>
+                <a:srgbClr val="000000"/>
+              </a:solidFill>
+              <a:latin typeface="Microsoft YaHei"/>
+              <a:ea typeface="Microsoft YaHei"/>
+              <a:cs typeface="Microsoft YaHei"/>
+            </a:endParaRPr>
+          </a:p>
+          <a:p>
+            <a:pPr marL="190500" indent="-190500" algn="just">
               <a:spcAft>
                 <a:spcPts val="1400"/>
               </a:spcAft>
@@ -9028,19 +9781,49 @@
               <a:buChar char="•"/>
             </a:pPr>
             <a:r>
-              <a:rPr sz="2000">
-                <a:solidFill>
-                  <a:srgbClr val="000000"/>
-                </a:solidFill>
-                <a:latin typeface="Microsoft YaHei"/>
-                <a:ea typeface="Microsoft YaHei"/>
-                <a:cs typeface="Microsoft YaHei"/>
-              </a:rPr>
-              <a:t>以 feature workflow 为基本单位，以模块化的方式管理、开发，划定功能边界，减少模块间的耦合依赖，易于拓展</a:t>
-            </a:r>
-          </a:p>
-          <a:p>
-            <a:pPr marL="647700" lvl="1" indent="-190500">
+              <a:rPr sz="2000" dirty="0" err="1">
+                <a:solidFill>
+                  <a:srgbClr val="000000"/>
+                </a:solidFill>
+                <a:latin typeface="Microsoft YaHei"/>
+                <a:ea typeface="Microsoft YaHei"/>
+                <a:cs typeface="Microsoft YaHei"/>
+              </a:rPr>
+              <a:t>以</a:t>
+            </a:r>
+            <a:r>
+              <a:rPr sz="2000" dirty="0">
+                <a:solidFill>
+                  <a:srgbClr val="000000"/>
+                </a:solidFill>
+                <a:latin typeface="Microsoft YaHei"/>
+                <a:ea typeface="Microsoft YaHei"/>
+                <a:cs typeface="Microsoft YaHei"/>
+              </a:rPr>
+              <a:t> feature workflow </a:t>
+            </a:r>
+            <a:r>
+              <a:rPr sz="2000" dirty="0" err="1">
+                <a:solidFill>
+                  <a:srgbClr val="000000"/>
+                </a:solidFill>
+                <a:latin typeface="Microsoft YaHei"/>
+                <a:ea typeface="Microsoft YaHei"/>
+                <a:cs typeface="Microsoft YaHei"/>
+              </a:rPr>
+              <a:t>为基本单位，以模块化的方式管理、开发，划定功能边界，减少模块间的耦合依赖，易于拓展</a:t>
+            </a:r>
+            <a:endParaRPr sz="2000" dirty="0">
+              <a:solidFill>
+                <a:srgbClr val="000000"/>
+              </a:solidFill>
+              <a:latin typeface="Microsoft YaHei"/>
+              <a:ea typeface="Microsoft YaHei"/>
+              <a:cs typeface="Microsoft YaHei"/>
+            </a:endParaRPr>
+          </a:p>
+          <a:p>
+            <a:pPr marL="647700" lvl="1" indent="-190500" algn="just">
               <a:spcAft>
                 <a:spcPts val="1400"/>
               </a:spcAft>
@@ -9048,19 +9831,52 @@
               <a:buChar char="•"/>
             </a:pPr>
             <a:r>
-              <a:rPr sz="2000">
-                <a:solidFill>
-                  <a:srgbClr val="000000"/>
-                </a:solidFill>
-                <a:latin typeface="Microsoft YaHei"/>
-                <a:ea typeface="Microsoft YaHei"/>
-                <a:cs typeface="Microsoft YaHei"/>
-              </a:rPr>
-              <a:t>代码 src/web</a:t>
-            </a:r>
-          </a:p>
-          <a:p>
-            <a:pPr marL="647700" lvl="1" indent="-190500">
+              <a:rPr sz="2000" dirty="0" err="1">
+                <a:solidFill>
+                  <a:srgbClr val="000000"/>
+                </a:solidFill>
+                <a:latin typeface="Microsoft YaHei"/>
+                <a:ea typeface="Microsoft YaHei"/>
+                <a:cs typeface="Microsoft YaHei"/>
+              </a:rPr>
+              <a:t>代码</a:t>
+            </a:r>
+            <a:r>
+              <a:rPr sz="2000" dirty="0">
+                <a:solidFill>
+                  <a:srgbClr val="000000"/>
+                </a:solidFill>
+                <a:latin typeface="Microsoft YaHei"/>
+                <a:ea typeface="Microsoft YaHei"/>
+                <a:cs typeface="Microsoft YaHei"/>
+              </a:rPr>
+              <a:t> </a:t>
+            </a:r>
+            <a:r>
+              <a:rPr sz="2000" dirty="0" err="1">
+                <a:solidFill>
+                  <a:srgbClr val="000000"/>
+                </a:solidFill>
+                <a:latin typeface="Microsoft YaHei"/>
+                <a:ea typeface="Microsoft YaHei"/>
+                <a:cs typeface="Microsoft YaHei"/>
+              </a:rPr>
+              <a:t>src</a:t>
+            </a:r>
+            <a:r>
+              <a:rPr sz="2000" dirty="0">
+                <a:solidFill>
+                  <a:srgbClr val="000000"/>
+                </a:solidFill>
+                <a:latin typeface="Microsoft YaHei"/>
+                <a:ea typeface="Microsoft YaHei"/>
+                <a:cs typeface="Microsoft YaHei"/>
+              </a:rPr>
+              <a:t>/web</a:t>
+            </a:r>
+          </a:p>
+          <a:p>
+            <a:pPr marL="647700" lvl="1" indent="-190500" algn="just">
               <a:spcAft>
                 <a:spcPts val="1400"/>
               </a:spcAft>
@@ -9068,19 +9884,30 @@
               <a:buChar char="•"/>
             </a:pPr>
             <a:r>
-              <a:rPr sz="2000">
-                <a:solidFill>
-                  <a:srgbClr val="000000"/>
-                </a:solidFill>
-                <a:latin typeface="Microsoft YaHei"/>
-                <a:ea typeface="Microsoft YaHei"/>
-                <a:cs typeface="Microsoft YaHei"/>
-              </a:rPr>
-              <a:t>测试 test</a:t>
-            </a:r>
-          </a:p>
-          <a:p>
-            <a:pPr marL="647700" lvl="1" indent="-190500">
+              <a:rPr sz="2000" dirty="0" err="1">
+                <a:solidFill>
+                  <a:srgbClr val="000000"/>
+                </a:solidFill>
+                <a:latin typeface="Microsoft YaHei"/>
+                <a:ea typeface="Microsoft YaHei"/>
+                <a:cs typeface="Microsoft YaHei"/>
+              </a:rPr>
+              <a:t>测试</a:t>
+            </a:r>
+            <a:r>
+              <a:rPr sz="2000" dirty="0">
+                <a:solidFill>
+                  <a:srgbClr val="000000"/>
+                </a:solidFill>
+                <a:latin typeface="Microsoft YaHei"/>
+                <a:ea typeface="Microsoft YaHei"/>
+                <a:cs typeface="Microsoft YaHei"/>
+              </a:rPr>
+              <a:t> test</a:t>
+            </a:r>
+          </a:p>
+          <a:p>
+            <a:pPr marL="647700" lvl="1" indent="-190500" algn="just">
               <a:spcAft>
                 <a:spcPts val="1400"/>
               </a:spcAft>
@@ -9088,19 +9915,38 @@
               <a:buChar char="•"/>
             </a:pPr>
             <a:r>
-              <a:rPr sz="2000">
-                <a:solidFill>
-                  <a:srgbClr val="000000"/>
-                </a:solidFill>
-                <a:latin typeface="Microsoft YaHei"/>
-                <a:ea typeface="Microsoft YaHei"/>
-                <a:cs typeface="Microsoft YaHei"/>
-              </a:rPr>
-              <a:t>script: 工作流运行入口</a:t>
-            </a:r>
-          </a:p>
-          <a:p>
-            <a:pPr marL="647700" lvl="1" indent="-190500">
+              <a:rPr sz="2000" dirty="0">
+                <a:solidFill>
+                  <a:srgbClr val="000000"/>
+                </a:solidFill>
+                <a:latin typeface="Microsoft YaHei"/>
+                <a:ea typeface="Microsoft YaHei"/>
+                <a:cs typeface="Microsoft YaHei"/>
+              </a:rPr>
+              <a:t>script: </a:t>
+            </a:r>
+            <a:r>
+              <a:rPr sz="2000" dirty="0" err="1">
+                <a:solidFill>
+                  <a:srgbClr val="000000"/>
+                </a:solidFill>
+                <a:latin typeface="Microsoft YaHei"/>
+                <a:ea typeface="Microsoft YaHei"/>
+                <a:cs typeface="Microsoft YaHei"/>
+              </a:rPr>
+              <a:t>工作流运行入口</a:t>
+            </a:r>
+            <a:endParaRPr sz="2000" dirty="0">
+              <a:solidFill>
+                <a:srgbClr val="000000"/>
+              </a:solidFill>
+              <a:latin typeface="Microsoft YaHei"/>
+              <a:ea typeface="Microsoft YaHei"/>
+              <a:cs typeface="Microsoft YaHei"/>
+            </a:endParaRPr>
+          </a:p>
+          <a:p>
+            <a:pPr marL="647700" lvl="1" indent="-190500" algn="just">
               <a:spcAft>
                 <a:spcPts val="1400"/>
               </a:spcAft>
@@ -9108,17 +9954,28 @@
               <a:buChar char="•"/>
             </a:pPr>
             <a:r>
-              <a:rPr sz="2000">
-                <a:solidFill>
-                  <a:srgbClr val="000000"/>
-                </a:solidFill>
-                <a:latin typeface="Microsoft YaHei"/>
-                <a:ea typeface="Microsoft YaHei"/>
-                <a:cs typeface="Microsoft YaHei"/>
-              </a:rPr>
-              <a:t>配置 config </a:t>
-            </a:r>
-            <a:endParaRPr sz="2000"/>
+              <a:rPr sz="2000" dirty="0" err="1">
+                <a:solidFill>
+                  <a:srgbClr val="000000"/>
+                </a:solidFill>
+                <a:latin typeface="Microsoft YaHei"/>
+                <a:ea typeface="Microsoft YaHei"/>
+                <a:cs typeface="Microsoft YaHei"/>
+              </a:rPr>
+              <a:t>配置</a:t>
+            </a:r>
+            <a:r>
+              <a:rPr sz="2000" dirty="0">
+                <a:solidFill>
+                  <a:srgbClr val="000000"/>
+                </a:solidFill>
+                <a:latin typeface="Microsoft YaHei"/>
+                <a:ea typeface="Microsoft YaHei"/>
+                <a:cs typeface="Microsoft YaHei"/>
+              </a:rPr>
+              <a:t> config </a:t>
+            </a:r>
+            <a:endParaRPr sz="2000" dirty="0"/>
           </a:p>
         </p:txBody>
       </p:sp>
@@ -9911,15 +10768,48 @@
               <a:buChar char="•"/>
             </a:pPr>
             <a:r>
-              <a:rPr sz="2000">
-                <a:solidFill>
-                  <a:srgbClr val="000000"/>
-                </a:solidFill>
-                <a:latin typeface="Microsoft YaHei"/>
-                <a:ea typeface="Microsoft YaHei"/>
-                <a:cs typeface="Microsoft YaHei"/>
-              </a:rPr>
-              <a:t>项目内AGENTS.md 文件写作原则：</a:t>
+              <a:rPr sz="2000" dirty="0" err="1">
+                <a:solidFill>
+                  <a:srgbClr val="000000"/>
+                </a:solidFill>
+                <a:latin typeface="Microsoft YaHei"/>
+                <a:ea typeface="Microsoft YaHei"/>
+                <a:cs typeface="Microsoft YaHei"/>
+              </a:rPr>
+              <a:t>项目内AGENTS.md</a:t>
+            </a:r>
+            <a:r>
+              <a:rPr sz="2000" dirty="0">
+                <a:solidFill>
+                  <a:srgbClr val="000000"/>
+                </a:solidFill>
+                <a:latin typeface="Microsoft YaHei"/>
+                <a:ea typeface="Microsoft YaHei"/>
+                <a:cs typeface="Microsoft YaHei"/>
+              </a:rPr>
+              <a:t> </a:t>
+            </a:r>
+            <a:r>
+              <a:rPr sz="2000" dirty="0" err="1">
+                <a:solidFill>
+                  <a:srgbClr val="000000"/>
+                </a:solidFill>
+                <a:latin typeface="Microsoft YaHei"/>
+                <a:ea typeface="Microsoft YaHei"/>
+                <a:cs typeface="Microsoft YaHei"/>
+              </a:rPr>
+              <a:t>文件写作原则</a:t>
+            </a:r>
+            <a:r>
+              <a:rPr sz="2000" dirty="0">
+                <a:solidFill>
+                  <a:srgbClr val="000000"/>
+                </a:solidFill>
+                <a:latin typeface="Microsoft YaHei"/>
+                <a:ea typeface="Microsoft YaHei"/>
+                <a:cs typeface="Microsoft YaHei"/>
+              </a:rPr>
+              <a:t>：</a:t>
             </a:r>
           </a:p>
           <a:p>
@@ -9931,16 +10821,46 @@
               <a:buChar char="•"/>
             </a:pPr>
             <a:r>
-              <a:rPr sz="2000">
-                <a:solidFill>
-                  <a:srgbClr val="000000"/>
-                </a:solidFill>
-                <a:latin typeface="Microsoft YaHei"/>
-                <a:ea typeface="Microsoft YaHei"/>
-                <a:cs typeface="Microsoft YaHei"/>
-              </a:rPr>
-              <a:t>尽量简洁：可包含项目背景、工作规则、工具规范</a:t>
-            </a:r>
+              <a:rPr sz="2000" dirty="0" err="1">
+                <a:solidFill>
+                  <a:srgbClr val="000000"/>
+                </a:solidFill>
+                <a:latin typeface="Microsoft YaHei"/>
+                <a:ea typeface="Microsoft YaHei"/>
+                <a:cs typeface="Microsoft YaHei"/>
+              </a:rPr>
+              <a:t>尽量简洁：可包含项目背景、</a:t>
+            </a:r>
+            <a:r>
+              <a:rPr lang="en-US" sz="2000" dirty="0" err="1">
+                <a:solidFill>
+                  <a:srgbClr val="000000"/>
+                </a:solidFill>
+                <a:latin typeface="Microsoft YaHei"/>
+                <a:ea typeface="Microsoft YaHei"/>
+                <a:cs typeface="Microsoft YaHei"/>
+              </a:rPr>
+              <a:t>安全</a:t>
+            </a:r>
+            <a:r>
+              <a:rPr sz="2000" dirty="0" err="1">
+                <a:solidFill>
+                  <a:srgbClr val="000000"/>
+                </a:solidFill>
+                <a:latin typeface="Microsoft YaHei"/>
+                <a:ea typeface="Microsoft YaHei"/>
+                <a:cs typeface="Microsoft YaHei"/>
+              </a:rPr>
+              <a:t>规则、工具规范</a:t>
+            </a:r>
+            <a:endParaRPr sz="2000" dirty="0">
+              <a:solidFill>
+                <a:srgbClr val="000000"/>
+              </a:solidFill>
+              <a:latin typeface="Microsoft YaHei"/>
+              <a:ea typeface="Microsoft YaHei"/>
+              <a:cs typeface="Microsoft YaHei"/>
+            </a:endParaRPr>
           </a:p>
           <a:p>
             <a:pPr marL="647700" lvl="1" indent="-190500">
@@ -9951,15 +10871,26 @@
               <a:buChar char="•"/>
             </a:pPr>
             <a:r>
-              <a:rPr sz="2000">
-                <a:solidFill>
-                  <a:srgbClr val="000000"/>
-                </a:solidFill>
-                <a:latin typeface="Microsoft YaHei"/>
-                <a:ea typeface="Microsoft YaHei"/>
-                <a:cs typeface="Microsoft YaHei"/>
-              </a:rPr>
-              <a:t>渐进式披露：map, references </a:t>
+              <a:rPr sz="2000" dirty="0" err="1">
+                <a:solidFill>
+                  <a:srgbClr val="000000"/>
+                </a:solidFill>
+                <a:latin typeface="Microsoft YaHei"/>
+                <a:ea typeface="Microsoft YaHei"/>
+                <a:cs typeface="Microsoft YaHei"/>
+              </a:rPr>
+              <a:t>渐进式披露：map</a:t>
+            </a:r>
+            <a:r>
+              <a:rPr sz="2000" dirty="0">
+                <a:solidFill>
+                  <a:srgbClr val="000000"/>
+                </a:solidFill>
+                <a:latin typeface="Microsoft YaHei"/>
+                <a:ea typeface="Microsoft YaHei"/>
+                <a:cs typeface="Microsoft YaHei"/>
+              </a:rPr>
+              <a:t>, references </a:t>
             </a:r>
           </a:p>
           <a:p>
@@ -9971,7 +10902,7 @@
               <a:buChar char="•"/>
             </a:pPr>
             <a:r>
-              <a:rPr sz="2000">
+              <a:rPr sz="2000" dirty="0" err="1">
                 <a:solidFill>
                   <a:srgbClr val="000000"/>
                 </a:solidFill>
@@ -9981,7 +10912,40 @@
               </a:rPr>
               <a:t>示例</a:t>
             </a:r>
-            <a:endParaRPr sz="2000"/>
+            <a:r>
+              <a:rPr lang="zh-CN" altLang="en-US" sz="2000" dirty="0">
+                <a:solidFill>
+                  <a:srgbClr val="000000"/>
+                </a:solidFill>
+                <a:latin typeface="Microsoft YaHei"/>
+                <a:ea typeface="Microsoft YaHei"/>
+                <a:cs typeface="Microsoft YaHei"/>
+              </a:rPr>
+              <a:t>（</a:t>
+            </a:r>
+            <a:r>
+              <a:rPr lang="en-US" altLang="zh-CN" sz="2000" dirty="0">
+                <a:solidFill>
+                  <a:srgbClr val="000000"/>
+                </a:solidFill>
+                <a:latin typeface="Microsoft YaHei"/>
+                <a:ea typeface="Microsoft YaHei"/>
+                <a:cs typeface="Microsoft YaHei"/>
+              </a:rPr>
+              <a:t>PVI</a:t>
+            </a:r>
+            <a:r>
+              <a:rPr lang="zh-CN" altLang="en-US" sz="2000" dirty="0">
+                <a:solidFill>
+                  <a:srgbClr val="000000"/>
+                </a:solidFill>
+                <a:latin typeface="Microsoft YaHei"/>
+                <a:ea typeface="Microsoft YaHei"/>
+                <a:cs typeface="Microsoft YaHei"/>
+              </a:rPr>
+              <a:t>项目）</a:t>
+            </a:r>
+            <a:endParaRPr sz="2000" dirty="0"/>
           </a:p>
         </p:txBody>
       </p:sp>
@@ -10138,7 +11102,7 @@
           <p:cNvPr id="2" name="Text 0">
             <a:extLst>
               <a:ext uri="{FF2B5EF4-FFF2-40B4-BE49-F238E27FC236}">
-                <a16:creationId xmlns:a16="http://schemas.microsoft.com/office/drawing/2014/main" id="{9DA45C31-79AD-4257-8C00-471939A3CB3E}"/>
+                <a16:creationId xmlns:a16="http://schemas.microsoft.com/office/drawing/2014/main" id="{94E9F46F-0E96-4048-8F77-129D8E479B60}"/>
               </a:ext>
             </a:extLst>
           </p:cNvPr>
@@ -10184,7 +11148,7 @@
           <p:cNvPr id="3" name="Text 1">
             <a:extLst>
               <a:ext uri="{FF2B5EF4-FFF2-40B4-BE49-F238E27FC236}">
-                <a16:creationId xmlns:a16="http://schemas.microsoft.com/office/drawing/2014/main" id="{8A75001F-2116-46ED-B8AB-7D909B4E251D}"/>
+                <a16:creationId xmlns:a16="http://schemas.microsoft.com/office/drawing/2014/main" id="{5AFD99AF-7E19-417D-A175-4CCA40EBBBB0}"/>
               </a:ext>
             </a:extLst>
           </p:cNvPr>
@@ -10230,7 +11194,7 @@
           <p:cNvPr id="4" name="Text 2">
             <a:extLst>
               <a:ext uri="{FF2B5EF4-FFF2-40B4-BE49-F238E27FC236}">
-                <a16:creationId xmlns:a16="http://schemas.microsoft.com/office/drawing/2014/main" id="{840D8139-5588-49D8-8E1E-D971A63086D7}"/>
+                <a16:creationId xmlns:a16="http://schemas.microsoft.com/office/drawing/2014/main" id="{F7384131-BA3B-40B6-BD3E-227DD5DADC3F}"/>
               </a:ext>
             </a:extLst>
           </p:cNvPr>
@@ -10276,7 +11240,7 @@
           <p:cNvPr id="5" name="Text 3">
             <a:extLst>
               <a:ext uri="{FF2B5EF4-FFF2-40B4-BE49-F238E27FC236}">
-                <a16:creationId xmlns:a16="http://schemas.microsoft.com/office/drawing/2014/main" id="{ADB49B75-BA2A-4859-921B-BDA5084BEA20}"/>
+                <a16:creationId xmlns:a16="http://schemas.microsoft.com/office/drawing/2014/main" id="{F9105164-9C18-4DD9-B664-7F69C7B7B66A}"/>
               </a:ext>
             </a:extLst>
           </p:cNvPr>
@@ -10322,7 +11286,7 @@
           <p:cNvPr id="6" name="Text 4">
             <a:extLst>
               <a:ext uri="{FF2B5EF4-FFF2-40B4-BE49-F238E27FC236}">
-                <a16:creationId xmlns:a16="http://schemas.microsoft.com/office/drawing/2014/main" id="{AB44B607-B9E6-4DB9-9D46-B22DE9F189D0}"/>
+                <a16:creationId xmlns:a16="http://schemas.microsoft.com/office/drawing/2014/main" id="{E45EEB84-2B7C-41D3-AD15-37CD819E8722}"/>
               </a:ext>
             </a:extLst>
           </p:cNvPr>
@@ -10368,7 +11332,7 @@
           <p:cNvPr id="7" name="Text 5">
             <a:extLst>
               <a:ext uri="{FF2B5EF4-FFF2-40B4-BE49-F238E27FC236}">
-                <a16:creationId xmlns:a16="http://schemas.microsoft.com/office/drawing/2014/main" id="{4D8921C3-D862-42E0-9346-4FC3D969FF96}"/>
+                <a16:creationId xmlns:a16="http://schemas.microsoft.com/office/drawing/2014/main" id="{049C8953-0957-4254-9D45-EB8DEED6B679}"/>
               </a:ext>
             </a:extLst>
           </p:cNvPr>
@@ -10395,7 +11359,7 @@
               <a:buNone/>
             </a:pPr>
             <a:r>
-              <a:rPr sz="2600" b="1">
+              <a:rPr sz="2600" b="1" dirty="0">
                 <a:solidFill>
                   <a:srgbClr val="1F4E79"/>
                 </a:solidFill>
@@ -10403,9 +11367,42 @@
                 <a:ea typeface="Microsoft YaHei"/>
                 <a:cs typeface="Microsoft YaHei"/>
               </a:rPr>
-              <a:t>4.4. 代码规范</a:t>
-            </a:r>
-            <a:endParaRPr sz="2600"/>
+              <a:t>4.</a:t>
+            </a:r>
+            <a:r>
+              <a:rPr lang="en-US" altLang="zh-CN" sz="2600" b="1" dirty="0">
+                <a:solidFill>
+                  <a:srgbClr val="1F4E79"/>
+                </a:solidFill>
+                <a:latin typeface="Microsoft YaHei"/>
+                <a:ea typeface="Microsoft YaHei"/>
+                <a:cs typeface="Microsoft YaHei"/>
+              </a:rPr>
+              <a:t>4</a:t>
+            </a:r>
+            <a:r>
+              <a:rPr sz="2600" b="1" dirty="0">
+                <a:solidFill>
+                  <a:srgbClr val="1F4E79"/>
+                </a:solidFill>
+                <a:latin typeface="Microsoft YaHei"/>
+                <a:ea typeface="Microsoft YaHei"/>
+                <a:cs typeface="Microsoft YaHei"/>
+              </a:rPr>
+              <a:t>. </a:t>
+            </a:r>
+            <a:r>
+              <a:rPr sz="2600" b="1" dirty="0" err="1">
+                <a:solidFill>
+                  <a:srgbClr val="1F4E79"/>
+                </a:solidFill>
+                <a:latin typeface="Microsoft YaHei"/>
+                <a:ea typeface="Microsoft YaHei"/>
+                <a:cs typeface="Microsoft YaHei"/>
+              </a:rPr>
+              <a:t>数据管理</a:t>
+            </a:r>
+            <a:endParaRPr sz="2600" dirty="0"/>
           </a:p>
         </p:txBody>
       </p:sp>
@@ -10414,7 +11411,7 @@
           <p:cNvPr id="8" name="Shape 6">
             <a:extLst>
               <a:ext uri="{FF2B5EF4-FFF2-40B4-BE49-F238E27FC236}">
-                <a16:creationId xmlns:a16="http://schemas.microsoft.com/office/drawing/2014/main" id="{8B99418C-212D-4963-9D69-EF431190D123}"/>
+                <a16:creationId xmlns:a16="http://schemas.microsoft.com/office/drawing/2014/main" id="{350B75D2-FB24-49BE-8B9D-805609F508BB}"/>
               </a:ext>
             </a:extLst>
           </p:cNvPr>
@@ -10456,7 +11453,7 @@
           <p:cNvPr id="9" name="Text 7">
             <a:extLst>
               <a:ext uri="{FF2B5EF4-FFF2-40B4-BE49-F238E27FC236}">
-                <a16:creationId xmlns:a16="http://schemas.microsoft.com/office/drawing/2014/main" id="{C5B1E1C2-8CC3-4999-B0E9-BB2F514A998B}"/>
+                <a16:creationId xmlns:a16="http://schemas.microsoft.com/office/drawing/2014/main" id="{7A779F1C-495C-458E-959F-2AB18FDD48F2}"/>
               </a:ext>
             </a:extLst>
           </p:cNvPr>
@@ -10487,16 +11484,79 @@
               <a:buChar char="•"/>
             </a:pPr>
             <a:r>
-              <a:rPr sz="2000">
-                <a:solidFill>
-                  <a:srgbClr val="000000"/>
-                </a:solidFill>
-                <a:latin typeface="Microsoft YaHei"/>
-                <a:ea typeface="Microsoft YaHei"/>
-                <a:cs typeface="Microsoft YaHei"/>
-              </a:rPr>
-              <a:t>让 AI 写的代码可测试、更规范，避免非功能性错误</a:t>
-            </a:r>
+              <a:rPr sz="2000" dirty="0" err="1">
+                <a:solidFill>
+                  <a:srgbClr val="000000"/>
+                </a:solidFill>
+                <a:latin typeface="Microsoft YaHei"/>
+                <a:ea typeface="Microsoft YaHei"/>
+                <a:cs typeface="Microsoft YaHei"/>
+              </a:rPr>
+              <a:t>设置权限</a:t>
+            </a:r>
+            <a:r>
+              <a:rPr sz="2000" dirty="0">
+                <a:solidFill>
+                  <a:srgbClr val="000000"/>
+                </a:solidFill>
+                <a:latin typeface="Microsoft YaHei"/>
+                <a:ea typeface="Microsoft YaHei"/>
+                <a:cs typeface="Microsoft YaHei"/>
+              </a:rPr>
+              <a:t>: `</a:t>
+            </a:r>
+            <a:r>
+              <a:rPr sz="2000" dirty="0" err="1">
+                <a:solidFill>
+                  <a:srgbClr val="000000"/>
+                </a:solidFill>
+                <a:latin typeface="Microsoft YaHei"/>
+                <a:ea typeface="Microsoft YaHei"/>
+                <a:cs typeface="Microsoft YaHei"/>
+              </a:rPr>
+              <a:t>sudo</a:t>
+            </a:r>
+            <a:r>
+              <a:rPr sz="2000" dirty="0">
+                <a:solidFill>
+                  <a:srgbClr val="000000"/>
+                </a:solidFill>
+                <a:latin typeface="Microsoft YaHei"/>
+                <a:ea typeface="Microsoft YaHei"/>
+                <a:cs typeface="Microsoft YaHei"/>
+              </a:rPr>
+              <a:t> </a:t>
+            </a:r>
+            <a:r>
+              <a:rPr sz="2000" dirty="0" err="1">
+                <a:solidFill>
+                  <a:srgbClr val="000000"/>
+                </a:solidFill>
+                <a:latin typeface="Microsoft YaHei"/>
+                <a:ea typeface="Microsoft YaHei"/>
+                <a:cs typeface="Microsoft YaHei"/>
+              </a:rPr>
+              <a:t>chmod</a:t>
+            </a:r>
+            <a:r>
+              <a:rPr sz="2000" dirty="0">
+                <a:solidFill>
+                  <a:srgbClr val="000000"/>
+                </a:solidFill>
+                <a:latin typeface="Microsoft YaHei"/>
+                <a:ea typeface="Microsoft YaHei"/>
+                <a:cs typeface="Microsoft YaHei"/>
+              </a:rPr>
+              <a:t> –R 555 data`</a:t>
+            </a:r>
+            <a:endParaRPr lang="en-US" sz="2000" dirty="0">
+              <a:solidFill>
+                <a:srgbClr val="000000"/>
+              </a:solidFill>
+              <a:latin typeface="Microsoft YaHei"/>
+              <a:ea typeface="Microsoft YaHei"/>
+              <a:cs typeface="Microsoft YaHei"/>
+            </a:endParaRPr>
           </a:p>
           <a:p>
             <a:pPr marL="190500" indent="-190500" algn="l">
@@ -10507,20 +11567,38 @@
               <a:buChar char="•"/>
             </a:pPr>
             <a:r>
-              <a:rPr sz="2000">
-                <a:solidFill>
-                  <a:srgbClr val="000000"/>
-                </a:solidFill>
-                <a:latin typeface="Microsoft YaHei"/>
-                <a:ea typeface="Microsoft YaHei"/>
-                <a:cs typeface="Microsoft YaHei"/>
-              </a:rPr>
-              <a:t>实践经验：my coding practices</a:t>
-            </a:r>
-            <a:endParaRPr sz="2000"/>
-          </a:p>
-          <a:p>
-            <a:pPr marL="190500" indent="-190500" algn="l">
+              <a:rPr sz="2000" dirty="0" err="1">
+                <a:solidFill>
+                  <a:srgbClr val="000000"/>
+                </a:solidFill>
+                <a:latin typeface="Microsoft YaHei"/>
+                <a:ea typeface="Microsoft YaHei"/>
+                <a:cs typeface="Microsoft YaHei"/>
+              </a:rPr>
+              <a:t>可读、可执行、不可写</a:t>
+            </a:r>
+            <a:r>
+              <a:rPr lang="zh-CN" altLang="en-US" sz="2000" dirty="0">
+                <a:solidFill>
+                  <a:srgbClr val="000000"/>
+                </a:solidFill>
+                <a:latin typeface="Microsoft YaHei"/>
+                <a:ea typeface="Microsoft YaHei"/>
+                <a:cs typeface="Microsoft YaHei"/>
+              </a:rPr>
+              <a:t>（示例）</a:t>
+            </a:r>
+            <a:endParaRPr sz="2000" dirty="0">
+              <a:solidFill>
+                <a:srgbClr val="000000"/>
+              </a:solidFill>
+              <a:latin typeface="Microsoft YaHei"/>
+              <a:ea typeface="Microsoft YaHei"/>
+              <a:cs typeface="Microsoft YaHei"/>
+            </a:endParaRPr>
+          </a:p>
+          <a:p>
+            <a:pPr marL="190500" indent="-190500">
               <a:spcAft>
                 <a:spcPts val="1400"/>
               </a:spcAft>
@@ -10528,16 +11606,68 @@
               <a:buChar char="•"/>
             </a:pPr>
             <a:r>
-              <a:rPr sz="2000">
-                <a:solidFill>
-                  <a:srgbClr val="000000"/>
-                </a:solidFill>
-                <a:latin typeface="Microsoft YaHei"/>
-                <a:ea typeface="Microsoft YaHei"/>
-                <a:cs typeface="Microsoft YaHei"/>
-              </a:rPr>
-              <a:t>pytest、ruff、mypy 工具及其配置方式</a:t>
-            </a:r>
+              <a:rPr sz="2000" dirty="0" err="1">
+                <a:solidFill>
+                  <a:srgbClr val="000000"/>
+                </a:solidFill>
+                <a:latin typeface="Microsoft YaHei"/>
+                <a:ea typeface="Microsoft YaHei"/>
+                <a:cs typeface="Microsoft YaHei"/>
+              </a:rPr>
+              <a:t>在</a:t>
+            </a:r>
+            <a:r>
+              <a:rPr sz="2000" dirty="0">
+                <a:solidFill>
+                  <a:srgbClr val="000000"/>
+                </a:solidFill>
+                <a:latin typeface="Microsoft YaHei"/>
+                <a:ea typeface="Microsoft YaHei"/>
+                <a:cs typeface="Microsoft YaHei"/>
+              </a:rPr>
+              <a:t> </a:t>
+            </a:r>
+            <a:r>
+              <a:rPr sz="2000" dirty="0" err="1">
+                <a:solidFill>
+                  <a:srgbClr val="000000"/>
+                </a:solidFill>
+                <a:latin typeface="Microsoft YaHei"/>
+                <a:ea typeface="Microsoft YaHei"/>
+                <a:cs typeface="Microsoft YaHei"/>
+              </a:rPr>
+              <a:t>AGENTS.md</a:t>
+            </a:r>
+            <a:r>
+              <a:rPr sz="2000" dirty="0">
+                <a:solidFill>
+                  <a:srgbClr val="000000"/>
+                </a:solidFill>
+                <a:latin typeface="Microsoft YaHei"/>
+                <a:ea typeface="Microsoft YaHei"/>
+                <a:cs typeface="Microsoft YaHei"/>
+              </a:rPr>
+              <a:t> </a:t>
+            </a:r>
+            <a:r>
+              <a:rPr sz="2000" dirty="0" err="1">
+                <a:solidFill>
+                  <a:srgbClr val="000000"/>
+                </a:solidFill>
+                <a:latin typeface="Microsoft YaHei"/>
+                <a:ea typeface="Microsoft YaHei"/>
+                <a:cs typeface="Microsoft YaHei"/>
+              </a:rPr>
+              <a:t>指明数据路径</a:t>
+            </a:r>
+            <a:endParaRPr lang="en-US" sz="2000" dirty="0">
+              <a:solidFill>
+                <a:srgbClr val="000000"/>
+              </a:solidFill>
+              <a:latin typeface="Microsoft YaHei"/>
+              <a:ea typeface="Microsoft YaHei"/>
+              <a:cs typeface="Microsoft YaHei"/>
+            </a:endParaRPr>
           </a:p>
           <a:p>
             <a:pPr marL="190500" indent="-190500">
@@ -10545,21 +11675,59 @@
                 <a:spcPts val="1400"/>
               </a:spcAft>
               <a:buSzPct val="100000"/>
-              <a:buFontTx/>
               <a:buChar char="•"/>
             </a:pPr>
             <a:r>
-              <a:rPr sz="2000">
-                <a:solidFill>
-                  <a:srgbClr val="000000"/>
-                </a:solidFill>
-                <a:latin typeface="Microsoft YaHei"/>
-                <a:ea typeface="Microsoft YaHei"/>
-                <a:cs typeface="Microsoft YaHei"/>
-              </a:rPr>
-              <a:t>INIT.sh 文件</a:t>
-            </a:r>
-            <a:endParaRPr sz="2000"/>
+              <a:rPr lang="en-US" sz="2000" dirty="0" err="1">
+                <a:solidFill>
+                  <a:srgbClr val="000000"/>
+                </a:solidFill>
+                <a:latin typeface="Microsoft YaHei"/>
+                <a:ea typeface="Microsoft YaHei"/>
+              </a:rPr>
+              <a:t>大</a:t>
+            </a:r>
+            <a:r>
+              <a:rPr lang="zh-CN" altLang="en-US" sz="2000" dirty="0">
+                <a:solidFill>
+                  <a:srgbClr val="000000"/>
+                </a:solidFill>
+                <a:latin typeface="Microsoft YaHei"/>
+                <a:ea typeface="Microsoft YaHei"/>
+              </a:rPr>
+              <a:t>体积</a:t>
+            </a:r>
+            <a:r>
+              <a:rPr lang="en-US" sz="2000" dirty="0" err="1">
+                <a:solidFill>
+                  <a:srgbClr val="000000"/>
+                </a:solidFill>
+                <a:latin typeface="Microsoft YaHei"/>
+                <a:ea typeface="Microsoft YaHei"/>
+              </a:rPr>
+              <a:t>数据不上传</a:t>
+            </a:r>
+            <a:r>
+              <a:rPr lang="zh-CN" altLang="en-US" sz="2000" dirty="0">
+                <a:solidFill>
+                  <a:srgbClr val="000000"/>
+                </a:solidFill>
+                <a:latin typeface="Microsoft YaHei"/>
+                <a:ea typeface="Microsoft YaHei"/>
+              </a:rPr>
+              <a:t> </a:t>
+            </a:r>
+            <a:r>
+              <a:rPr lang="en-US" altLang="zh-CN" sz="2000" dirty="0">
+                <a:solidFill>
+                  <a:srgbClr val="000000"/>
+                </a:solidFill>
+                <a:latin typeface="Microsoft YaHei"/>
+                <a:ea typeface="Microsoft YaHei"/>
+              </a:rPr>
+              <a:t>git/web</a:t>
+            </a:r>
+            <a:endParaRPr sz="2000" dirty="0"/>
           </a:p>
         </p:txBody>
       </p:sp>
@@ -10568,7 +11736,7 @@
           <p:cNvPr id="25" name="Slide Number Placeholder 0">
             <a:extLst>
               <a:ext uri="{FF2B5EF4-FFF2-40B4-BE49-F238E27FC236}">
-                <a16:creationId xmlns:a16="http://schemas.microsoft.com/office/drawing/2014/main" id="{7CCA4704-4C29-434D-91F2-B9FB5F38C448}"/>
+                <a16:creationId xmlns:a16="http://schemas.microsoft.com/office/drawing/2014/main" id="{34F32AA1-F7ED-4CE2-A715-F400BB4DBDEF}"/>
               </a:ext>
             </a:extLst>
           </p:cNvPr>
@@ -10615,12 +11783,36 @@
           </a:p>
         </p:txBody>
       </p:sp>
-      <p:sp>
-        <p:nvSpPr>
-          <p:cNvPr id="26" name="Section navigation 6 Discussion">
-            <a:extLst>
-              <a:ext uri="{FF2B5EF4-FFF2-40B4-BE49-F238E27FC236}">
-                <a16:creationId xmlns:a16="http://schemas.microsoft.com/office/drawing/2014/main" id="{1E5A1288-9187-4D5B-9FE3-75FF61E441A2}"/>
+      <p:pic>
+        <p:nvPicPr>
+          <p:cNvPr id="37" name="图片 9"/>
+          <p:cNvPicPr>
+            <a:picLocks noChangeAspect="1"/>
+          </p:cNvPicPr>
+          <p:nvPr/>
+        </p:nvPicPr>
+        <p:blipFill>
+          <a:blip r:embed="rId3"/>
+          <a:stretch>
+            <a:fillRect/>
+          </a:stretch>
+        </p:blipFill>
+        <p:spPr>
+          <a:xfrm>
+            <a:off x="4174569" y="3585464"/>
+            <a:ext cx="4440585" cy="968248"/>
+          </a:xfrm>
+          <a:prstGeom prst="rect">
+            <a:avLst/>
+          </a:prstGeom>
+        </p:spPr>
+      </p:pic>
+      <p:sp>
+        <p:nvSpPr>
+          <p:cNvPr id="27" name="Section navigation 6 Discussion">
+            <a:extLst>
+              <a:ext uri="{FF2B5EF4-FFF2-40B4-BE49-F238E27FC236}">
+                <a16:creationId xmlns:a16="http://schemas.microsoft.com/office/drawing/2014/main" id="{92741825-DCB3-49BF-BC1B-7834AE28A418}"/>
               </a:ext>
             </a:extLst>
           </p:cNvPr>
@@ -10676,7 +11868,7 @@
     </p:spTree>
     <p:extLst>
       <p:ext uri="{BB962C8B-B14F-4D97-AF65-F5344CB8AC3E}">
-        <p14:creationId xmlns:p14="http://schemas.microsoft.com/office/powerpoint/2010/main" val="1147453230"/>
+        <p14:creationId xmlns:p14="http://schemas.microsoft.com/office/powerpoint/2010/main" val="1474509450"/>
       </p:ext>
     </p:extLst>
   </p:cSld>
@@ -10716,7 +11908,7 @@
           <p:cNvPr id="2" name="Text 0">
             <a:extLst>
               <a:ext uri="{FF2B5EF4-FFF2-40B4-BE49-F238E27FC236}">
-                <a16:creationId xmlns:a16="http://schemas.microsoft.com/office/drawing/2014/main" id="{94E9F46F-0E96-4048-8F77-129D8E479B60}"/>
+                <a16:creationId xmlns:a16="http://schemas.microsoft.com/office/drawing/2014/main" id="{9DA45C31-79AD-4257-8C00-471939A3CB3E}"/>
               </a:ext>
             </a:extLst>
           </p:cNvPr>
@@ -10762,7 +11954,7 @@
           <p:cNvPr id="3" name="Text 1">
             <a:extLst>
               <a:ext uri="{FF2B5EF4-FFF2-40B4-BE49-F238E27FC236}">
-                <a16:creationId xmlns:a16="http://schemas.microsoft.com/office/drawing/2014/main" id="{5AFD99AF-7E19-417D-A175-4CCA40EBBBB0}"/>
+                <a16:creationId xmlns:a16="http://schemas.microsoft.com/office/drawing/2014/main" id="{8A75001F-2116-46ED-B8AB-7D909B4E251D}"/>
               </a:ext>
             </a:extLst>
           </p:cNvPr>
@@ -10808,7 +12000,7 @@
           <p:cNvPr id="4" name="Text 2">
             <a:extLst>
               <a:ext uri="{FF2B5EF4-FFF2-40B4-BE49-F238E27FC236}">
-                <a16:creationId xmlns:a16="http://schemas.microsoft.com/office/drawing/2014/main" id="{F7384131-BA3B-40B6-BD3E-227DD5DADC3F}"/>
+                <a16:creationId xmlns:a16="http://schemas.microsoft.com/office/drawing/2014/main" id="{840D8139-5588-49D8-8E1E-D971A63086D7}"/>
               </a:ext>
             </a:extLst>
           </p:cNvPr>
@@ -10854,7 +12046,7 @@
           <p:cNvPr id="5" name="Text 3">
             <a:extLst>
               <a:ext uri="{FF2B5EF4-FFF2-40B4-BE49-F238E27FC236}">
-                <a16:creationId xmlns:a16="http://schemas.microsoft.com/office/drawing/2014/main" id="{F9105164-9C18-4DD9-B664-7F69C7B7B66A}"/>
+                <a16:creationId xmlns:a16="http://schemas.microsoft.com/office/drawing/2014/main" id="{ADB49B75-BA2A-4859-921B-BDA5084BEA20}"/>
               </a:ext>
             </a:extLst>
           </p:cNvPr>
@@ -10900,7 +12092,7 @@
           <p:cNvPr id="6" name="Text 4">
             <a:extLst>
               <a:ext uri="{FF2B5EF4-FFF2-40B4-BE49-F238E27FC236}">
-                <a16:creationId xmlns:a16="http://schemas.microsoft.com/office/drawing/2014/main" id="{E45EEB84-2B7C-41D3-AD15-37CD819E8722}"/>
+                <a16:creationId xmlns:a16="http://schemas.microsoft.com/office/drawing/2014/main" id="{AB44B607-B9E6-4DB9-9D46-B22DE9F189D0}"/>
               </a:ext>
             </a:extLst>
           </p:cNvPr>
@@ -10946,7 +12138,7 @@
           <p:cNvPr id="7" name="Text 5">
             <a:extLst>
               <a:ext uri="{FF2B5EF4-FFF2-40B4-BE49-F238E27FC236}">
-                <a16:creationId xmlns:a16="http://schemas.microsoft.com/office/drawing/2014/main" id="{049C8953-0957-4254-9D45-EB8DEED6B679}"/>
+                <a16:creationId xmlns:a16="http://schemas.microsoft.com/office/drawing/2014/main" id="{4D8921C3-D862-42E0-9346-4FC3D969FF96}"/>
               </a:ext>
             </a:extLst>
           </p:cNvPr>
@@ -10973,7 +12165,7 @@
               <a:buNone/>
             </a:pPr>
             <a:r>
-              <a:rPr sz="2600" b="1">
+              <a:rPr sz="2600" b="1" dirty="0">
                 <a:solidFill>
                   <a:srgbClr val="1F4E79"/>
                 </a:solidFill>
@@ -10981,9 +12173,42 @@
                 <a:ea typeface="Microsoft YaHei"/>
                 <a:cs typeface="Microsoft YaHei"/>
               </a:rPr>
-              <a:t>4.5. 数据管理</a:t>
-            </a:r>
-            <a:endParaRPr sz="2600"/>
+              <a:t>4.</a:t>
+            </a:r>
+            <a:r>
+              <a:rPr lang="en-US" altLang="zh-CN" sz="2600" b="1" dirty="0">
+                <a:solidFill>
+                  <a:srgbClr val="1F4E79"/>
+                </a:solidFill>
+                <a:latin typeface="Microsoft YaHei"/>
+                <a:ea typeface="Microsoft YaHei"/>
+                <a:cs typeface="Microsoft YaHei"/>
+              </a:rPr>
+              <a:t>5</a:t>
+            </a:r>
+            <a:r>
+              <a:rPr sz="2600" b="1" dirty="0">
+                <a:solidFill>
+                  <a:srgbClr val="1F4E79"/>
+                </a:solidFill>
+                <a:latin typeface="Microsoft YaHei"/>
+                <a:ea typeface="Microsoft YaHei"/>
+                <a:cs typeface="Microsoft YaHei"/>
+              </a:rPr>
+              <a:t>. </a:t>
+            </a:r>
+            <a:r>
+              <a:rPr sz="2600" b="1" dirty="0" err="1">
+                <a:solidFill>
+                  <a:srgbClr val="1F4E79"/>
+                </a:solidFill>
+                <a:latin typeface="Microsoft YaHei"/>
+                <a:ea typeface="Microsoft YaHei"/>
+                <a:cs typeface="Microsoft YaHei"/>
+              </a:rPr>
+              <a:t>代码规范</a:t>
+            </a:r>
+            <a:endParaRPr sz="2600" dirty="0"/>
           </a:p>
         </p:txBody>
       </p:sp>
@@ -10992,7 +12217,7 @@
           <p:cNvPr id="8" name="Shape 6">
             <a:extLst>
               <a:ext uri="{FF2B5EF4-FFF2-40B4-BE49-F238E27FC236}">
-                <a16:creationId xmlns:a16="http://schemas.microsoft.com/office/drawing/2014/main" id="{350B75D2-FB24-49BE-8B9D-805609F508BB}"/>
+                <a16:creationId xmlns:a16="http://schemas.microsoft.com/office/drawing/2014/main" id="{8B99418C-212D-4963-9D69-EF431190D123}"/>
               </a:ext>
             </a:extLst>
           </p:cNvPr>
@@ -11034,7 +12259,7 @@
           <p:cNvPr id="9" name="Text 7">
             <a:extLst>
               <a:ext uri="{FF2B5EF4-FFF2-40B4-BE49-F238E27FC236}">
-                <a16:creationId xmlns:a16="http://schemas.microsoft.com/office/drawing/2014/main" id="{7A779F1C-495C-458E-959F-2AB18FDD48F2}"/>
+                <a16:creationId xmlns:a16="http://schemas.microsoft.com/office/drawing/2014/main" id="{C5B1E1C2-8CC3-4999-B0E9-BB2F514A998B}"/>
               </a:ext>
             </a:extLst>
           </p:cNvPr>
@@ -11065,90 +12290,57 @@
               <a:buChar char="•"/>
             </a:pPr>
             <a:r>
-              <a:rPr sz="2000" dirty="0" err="1">
-                <a:solidFill>
-                  <a:srgbClr val="000000"/>
-                </a:solidFill>
-                <a:latin typeface="Microsoft YaHei"/>
-                <a:ea typeface="Microsoft YaHei"/>
-                <a:cs typeface="Microsoft YaHei"/>
-              </a:rPr>
-              <a:t>设置权限</a:t>
-            </a:r>
-            <a:r>
-              <a:rPr sz="2000" dirty="0">
-                <a:solidFill>
-                  <a:srgbClr val="000000"/>
-                </a:solidFill>
-                <a:latin typeface="Microsoft YaHei"/>
-                <a:ea typeface="Microsoft YaHei"/>
-                <a:cs typeface="Microsoft YaHei"/>
-              </a:rPr>
-              <a:t>: `</a:t>
-            </a:r>
-            <a:r>
-              <a:rPr sz="2000" dirty="0" err="1">
-                <a:solidFill>
-                  <a:srgbClr val="000000"/>
-                </a:solidFill>
-                <a:latin typeface="Microsoft YaHei"/>
-                <a:ea typeface="Microsoft YaHei"/>
-                <a:cs typeface="Microsoft YaHei"/>
-              </a:rPr>
-              <a:t>sudo</a:t>
-            </a:r>
-            <a:r>
-              <a:rPr sz="2000" dirty="0">
-                <a:solidFill>
-                  <a:srgbClr val="000000"/>
-                </a:solidFill>
-                <a:latin typeface="Microsoft YaHei"/>
-                <a:ea typeface="Microsoft YaHei"/>
-                <a:cs typeface="Microsoft YaHei"/>
-              </a:rPr>
-              <a:t> </a:t>
-            </a:r>
-            <a:r>
-              <a:rPr sz="2000" dirty="0" err="1">
-                <a:solidFill>
-                  <a:srgbClr val="000000"/>
-                </a:solidFill>
-                <a:latin typeface="Microsoft YaHei"/>
-                <a:ea typeface="Microsoft YaHei"/>
-                <a:cs typeface="Microsoft YaHei"/>
-              </a:rPr>
-              <a:t>chmod</a:t>
-            </a:r>
-            <a:r>
-              <a:rPr sz="2000" dirty="0">
-                <a:solidFill>
-                  <a:srgbClr val="000000"/>
-                </a:solidFill>
-                <a:latin typeface="Microsoft YaHei"/>
-                <a:ea typeface="Microsoft YaHei"/>
-                <a:cs typeface="Microsoft YaHei"/>
-              </a:rPr>
-              <a:t> –R 555 data`，</a:t>
-            </a:r>
-            <a:r>
-              <a:rPr sz="2000" dirty="0" err="1">
-                <a:solidFill>
-                  <a:srgbClr val="000000"/>
-                </a:solidFill>
-                <a:latin typeface="Microsoft YaHei"/>
-                <a:ea typeface="Microsoft YaHei"/>
-                <a:cs typeface="Microsoft YaHei"/>
-              </a:rPr>
-              <a:t>可读、可执行、不可写</a:t>
-            </a:r>
-            <a:endParaRPr sz="2000" dirty="0">
-              <a:solidFill>
-                <a:srgbClr val="000000"/>
-              </a:solidFill>
-              <a:latin typeface="Microsoft YaHei"/>
-              <a:ea typeface="Microsoft YaHei"/>
-              <a:cs typeface="Microsoft YaHei"/>
-            </a:endParaRPr>
+              <a:rPr sz="2000">
+                <a:solidFill>
+                  <a:srgbClr val="000000"/>
+                </a:solidFill>
+                <a:latin typeface="Microsoft YaHei"/>
+                <a:ea typeface="Microsoft YaHei"/>
+                <a:cs typeface="Microsoft YaHei"/>
+              </a:rPr>
+              <a:t>让 AI 写的代码可测试、更规范，避免非功能性错误</a:t>
+            </a:r>
+          </a:p>
+          <a:p>
+            <a:pPr marL="190500" indent="-190500" algn="l">
+              <a:spcAft>
+                <a:spcPts val="1400"/>
+              </a:spcAft>
+              <a:buSzPct val="100000"/>
+              <a:buChar char="•"/>
+            </a:pPr>
+            <a:r>
+              <a:rPr sz="2000">
+                <a:solidFill>
+                  <a:srgbClr val="000000"/>
+                </a:solidFill>
+                <a:latin typeface="Microsoft YaHei"/>
+                <a:ea typeface="Microsoft YaHei"/>
+                <a:cs typeface="Microsoft YaHei"/>
+              </a:rPr>
+              <a:t>实践经验：my coding practices</a:t>
+            </a:r>
+            <a:endParaRPr sz="2000"/>
+          </a:p>
+          <a:p>
+            <a:pPr marL="190500" indent="-190500" algn="l">
+              <a:spcAft>
+                <a:spcPts val="1400"/>
+              </a:spcAft>
+              <a:buSzPct val="100000"/>
+              <a:buChar char="•"/>
+            </a:pPr>
+            <a:r>
+              <a:rPr sz="2000">
+                <a:solidFill>
+                  <a:srgbClr val="000000"/>
+                </a:solidFill>
+                <a:latin typeface="Microsoft YaHei"/>
+                <a:ea typeface="Microsoft YaHei"/>
+                <a:cs typeface="Microsoft YaHei"/>
+              </a:rPr>
+              <a:t>pytest、ruff、mypy 工具及其配置方式</a:t>
+            </a:r>
           </a:p>
           <a:p>
             <a:pPr marL="190500" indent="-190500">
@@ -11156,131 +12348,21 @@
                 <a:spcPts val="1400"/>
               </a:spcAft>
               <a:buSzPct val="100000"/>
+              <a:buFontTx/>
               <a:buChar char="•"/>
             </a:pPr>
             <a:r>
-              <a:rPr sz="2000" dirty="0" err="1">
-                <a:solidFill>
-                  <a:srgbClr val="000000"/>
-                </a:solidFill>
-                <a:latin typeface="Microsoft YaHei"/>
-                <a:ea typeface="Microsoft YaHei"/>
-                <a:cs typeface="Microsoft YaHei"/>
-              </a:rPr>
-              <a:t>在</a:t>
-            </a:r>
-            <a:r>
-              <a:rPr sz="2000" dirty="0">
-                <a:solidFill>
-                  <a:srgbClr val="000000"/>
-                </a:solidFill>
-                <a:latin typeface="Microsoft YaHei"/>
-                <a:ea typeface="Microsoft YaHei"/>
-                <a:cs typeface="Microsoft YaHei"/>
-              </a:rPr>
-              <a:t> </a:t>
-            </a:r>
-            <a:r>
-              <a:rPr sz="2000" dirty="0" err="1">
-                <a:solidFill>
-                  <a:srgbClr val="000000"/>
-                </a:solidFill>
-                <a:latin typeface="Microsoft YaHei"/>
-                <a:ea typeface="Microsoft YaHei"/>
-                <a:cs typeface="Microsoft YaHei"/>
-              </a:rPr>
-              <a:t>AGENTS.md</a:t>
-            </a:r>
-            <a:r>
-              <a:rPr sz="2000" dirty="0">
-                <a:solidFill>
-                  <a:srgbClr val="000000"/>
-                </a:solidFill>
-                <a:latin typeface="Microsoft YaHei"/>
-                <a:ea typeface="Microsoft YaHei"/>
-                <a:cs typeface="Microsoft YaHei"/>
-              </a:rPr>
-              <a:t> </a:t>
-            </a:r>
-            <a:r>
-              <a:rPr sz="2000" dirty="0" err="1">
-                <a:solidFill>
-                  <a:srgbClr val="000000"/>
-                </a:solidFill>
-                <a:latin typeface="Microsoft YaHei"/>
-                <a:ea typeface="Microsoft YaHei"/>
-                <a:cs typeface="Microsoft YaHei"/>
-              </a:rPr>
-              <a:t>指明数据路径</a:t>
-            </a:r>
-            <a:endParaRPr lang="en-US" sz="2000" dirty="0">
-              <a:solidFill>
-                <a:srgbClr val="000000"/>
-              </a:solidFill>
-              <a:latin typeface="Microsoft YaHei"/>
-              <a:ea typeface="Microsoft YaHei"/>
-              <a:cs typeface="Microsoft YaHei"/>
-            </a:endParaRPr>
-          </a:p>
-          <a:p>
-            <a:pPr marL="190500" indent="-190500">
-              <a:spcAft>
-                <a:spcPts val="1400"/>
-              </a:spcAft>
-              <a:buSzPct val="100000"/>
-              <a:buChar char="•"/>
-            </a:pPr>
-            <a:r>
-              <a:rPr lang="en-US" sz="2000" dirty="0" err="1">
-                <a:solidFill>
-                  <a:srgbClr val="000000"/>
-                </a:solidFill>
-                <a:latin typeface="Microsoft YaHei"/>
-                <a:ea typeface="Microsoft YaHei"/>
-              </a:rPr>
-              <a:t>大</a:t>
-            </a:r>
-            <a:r>
-              <a:rPr lang="zh-CN" altLang="en-US" sz="2000" dirty="0">
-                <a:solidFill>
-                  <a:srgbClr val="000000"/>
-                </a:solidFill>
-                <a:latin typeface="Microsoft YaHei"/>
-                <a:ea typeface="Microsoft YaHei"/>
-              </a:rPr>
-              <a:t>体积</a:t>
-            </a:r>
-            <a:r>
-              <a:rPr lang="en-US" sz="2000" dirty="0" err="1">
-                <a:solidFill>
-                  <a:srgbClr val="000000"/>
-                </a:solidFill>
-                <a:latin typeface="Microsoft YaHei"/>
-                <a:ea typeface="Microsoft YaHei"/>
-              </a:rPr>
-              <a:t>数据不上传</a:t>
-            </a:r>
-            <a:r>
-              <a:rPr lang="zh-CN" altLang="en-US" sz="2000" dirty="0">
-                <a:solidFill>
-                  <a:srgbClr val="000000"/>
-                </a:solidFill>
-                <a:latin typeface="Microsoft YaHei"/>
-                <a:ea typeface="Microsoft YaHei"/>
-              </a:rPr>
-              <a:t> </a:t>
-            </a:r>
-            <a:r>
-              <a:rPr lang="en-US" altLang="zh-CN" sz="2000" dirty="0">
-                <a:solidFill>
-                  <a:srgbClr val="000000"/>
-                </a:solidFill>
-                <a:latin typeface="Microsoft YaHei"/>
-                <a:ea typeface="Microsoft YaHei"/>
-              </a:rPr>
-              <a:t>git/web</a:t>
-            </a:r>
-            <a:endParaRPr sz="2000" dirty="0"/>
+              <a:rPr sz="2000">
+                <a:solidFill>
+                  <a:srgbClr val="000000"/>
+                </a:solidFill>
+                <a:latin typeface="Microsoft YaHei"/>
+                <a:ea typeface="Microsoft YaHei"/>
+                <a:cs typeface="Microsoft YaHei"/>
+              </a:rPr>
+              <a:t>INIT.sh 文件</a:t>
+            </a:r>
+            <a:endParaRPr sz="2000"/>
           </a:p>
         </p:txBody>
       </p:sp>
@@ -11289,7 +12371,7 @@
           <p:cNvPr id="25" name="Slide Number Placeholder 0">
             <a:extLst>
               <a:ext uri="{FF2B5EF4-FFF2-40B4-BE49-F238E27FC236}">
-                <a16:creationId xmlns:a16="http://schemas.microsoft.com/office/drawing/2014/main" id="{34F32AA1-F7ED-4CE2-A715-F400BB4DBDEF}"/>
+                <a16:creationId xmlns:a16="http://schemas.microsoft.com/office/drawing/2014/main" id="{7CCA4704-4C29-434D-91F2-B9FB5F38C448}"/>
               </a:ext>
             </a:extLst>
           </p:cNvPr>
@@ -11336,36 +12418,12 @@
           </a:p>
         </p:txBody>
       </p:sp>
-      <p:pic>
-        <p:nvPicPr>
-          <p:cNvPr id="37" name="图片 9"/>
-          <p:cNvPicPr>
-            <a:picLocks noChangeAspect="1"/>
-          </p:cNvPicPr>
-          <p:nvPr/>
-        </p:nvPicPr>
-        <p:blipFill>
-          <a:blip r:embed="rId3"/>
-          <a:stretch>
-            <a:fillRect/>
-          </a:stretch>
-        </p:blipFill>
-        <p:spPr>
-          <a:xfrm>
-            <a:off x="3158813" y="3318564"/>
-            <a:ext cx="5067300" cy="1104900"/>
-          </a:xfrm>
-          <a:prstGeom prst="rect">
-            <a:avLst/>
-          </a:prstGeom>
-        </p:spPr>
-      </p:pic>
-      <p:sp>
-        <p:nvSpPr>
-          <p:cNvPr id="27" name="Section navigation 6 Discussion">
-            <a:extLst>
-              <a:ext uri="{FF2B5EF4-FFF2-40B4-BE49-F238E27FC236}">
-                <a16:creationId xmlns:a16="http://schemas.microsoft.com/office/drawing/2014/main" id="{92741825-DCB3-49BF-BC1B-7834AE28A418}"/>
+      <p:sp>
+        <p:nvSpPr>
+          <p:cNvPr id="26" name="Section navigation 6 Discussion">
+            <a:extLst>
+              <a:ext uri="{FF2B5EF4-FFF2-40B4-BE49-F238E27FC236}">
+                <a16:creationId xmlns:a16="http://schemas.microsoft.com/office/drawing/2014/main" id="{1E5A1288-9187-4D5B-9FE3-75FF61E441A2}"/>
               </a:ext>
             </a:extLst>
           </p:cNvPr>
@@ -11421,7 +12479,7 @@
     </p:spTree>
     <p:extLst>
       <p:ext uri="{BB962C8B-B14F-4D97-AF65-F5344CB8AC3E}">
-        <p14:creationId xmlns:p14="http://schemas.microsoft.com/office/powerpoint/2010/main" val="1474509450"/>
+        <p14:creationId xmlns:p14="http://schemas.microsoft.com/office/powerpoint/2010/main" val="1147453230"/>
       </p:ext>
     </p:extLst>
   </p:cSld>
@@ -11857,7 +12915,7 @@
         <p:spPr>
           <a:xfrm>
             <a:off x="762000" y="1287884"/>
-            <a:ext cx="7589520" cy="2914921"/>
+            <a:ext cx="7645400" cy="2914921"/>
           </a:xfrm>
           <a:prstGeom prst="rect">
             <a:avLst/>
@@ -11941,16 +12999,24 @@
               <a:t>, Test-Driven-Development</a:t>
             </a:r>
             <a:r>
-              <a:rPr sz="2000" dirty="0">
-                <a:solidFill>
-                  <a:srgbClr val="000000"/>
-                </a:solidFill>
-                <a:latin typeface="Microsoft YaHei"/>
-                <a:ea typeface="Microsoft YaHei"/>
-                <a:cs typeface="Microsoft YaHei"/>
-              </a:rPr>
-              <a:t> </a:t>
-            </a:r>
+              <a:rPr lang="zh-CN" altLang="en-US" sz="2000" dirty="0">
+                <a:solidFill>
+                  <a:srgbClr val="000000"/>
+                </a:solidFill>
+                <a:latin typeface="Microsoft YaHei"/>
+                <a:ea typeface="Microsoft YaHei"/>
+                <a:cs typeface="Microsoft YaHei"/>
+              </a:rPr>
+              <a:t>（用测试确认代码正确性）</a:t>
+            </a:r>
+            <a:endParaRPr sz="2000" dirty="0">
+              <a:solidFill>
+                <a:srgbClr val="000000"/>
+              </a:solidFill>
+              <a:latin typeface="Microsoft YaHei"/>
+              <a:ea typeface="Microsoft YaHei"/>
+              <a:cs typeface="Microsoft YaHei"/>
+            </a:endParaRPr>
           </a:p>
           <a:p>
             <a:pPr marL="190500" indent="-190500">
@@ -13340,40 +14406,7 @@
                 <a:ea typeface="Microsoft YaHei"/>
                 <a:cs typeface="Microsoft YaHei"/>
               </a:rPr>
-              <a:t> Latex </a:t>
-            </a:r>
-            <a:r>
-              <a:rPr sz="2000" dirty="0" err="1">
-                <a:solidFill>
-                  <a:srgbClr val="000000"/>
-                </a:solidFill>
-                <a:latin typeface="Microsoft YaHei"/>
-                <a:ea typeface="Microsoft YaHei"/>
-                <a:cs typeface="Microsoft YaHei"/>
-              </a:rPr>
-              <a:t>写作，方便</a:t>
-            </a:r>
-            <a:r>
-              <a:rPr sz="2000" dirty="0">
-                <a:solidFill>
-                  <a:srgbClr val="000000"/>
-                </a:solidFill>
-                <a:latin typeface="Microsoft YaHei"/>
-                <a:ea typeface="Microsoft YaHei"/>
-                <a:cs typeface="Microsoft YaHei"/>
-              </a:rPr>
-              <a:t> AI </a:t>
-            </a:r>
-            <a:r>
-              <a:rPr sz="2000" dirty="0" err="1">
-                <a:solidFill>
-                  <a:srgbClr val="000000"/>
-                </a:solidFill>
-                <a:latin typeface="Microsoft YaHei"/>
-                <a:ea typeface="Microsoft YaHei"/>
-                <a:cs typeface="Microsoft YaHei"/>
-              </a:rPr>
-              <a:t>读取、修改</a:t>
+              <a:t> Latex</a:t>
             </a:r>
             <a:r>
               <a:rPr lang="zh-CN" altLang="en-US" sz="2000" dirty="0">
@@ -13384,16 +14417,52 @@
                 <a:ea typeface="Microsoft YaHei"/>
                 <a:cs typeface="Microsoft YaHei"/>
               </a:rPr>
-              <a:t>（模板示例）</a:t>
-            </a:r>
-            <a:endParaRPr sz="2000" dirty="0">
-              <a:solidFill>
-                <a:srgbClr val="000000"/>
-              </a:solidFill>
-              <a:latin typeface="Microsoft YaHei"/>
-              <a:ea typeface="Microsoft YaHei"/>
-              <a:cs typeface="Microsoft YaHei"/>
-            </a:endParaRPr>
+              <a:t>；</a:t>
+            </a:r>
+            <a:r>
+              <a:rPr lang="en-US" altLang="zh-CN" sz="2000" dirty="0">
+                <a:solidFill>
+                  <a:srgbClr val="000000"/>
+                </a:solidFill>
+                <a:latin typeface="Microsoft YaHei"/>
+                <a:ea typeface="Microsoft YaHei"/>
+                <a:cs typeface="Microsoft YaHei"/>
+              </a:rPr>
+              <a:t>AI </a:t>
+            </a:r>
+            <a:r>
+              <a:rPr lang="zh-CN" altLang="en-US" sz="2000" dirty="0">
+                <a:solidFill>
+                  <a:srgbClr val="000000"/>
+                </a:solidFill>
+                <a:latin typeface="Microsoft YaHei"/>
+                <a:ea typeface="Microsoft YaHei"/>
+                <a:cs typeface="Microsoft YaHei"/>
+              </a:rPr>
+              <a:t>写作只能作为参考，不要完全依赖 </a:t>
+            </a:r>
+            <a:r>
+              <a:rPr lang="en-US" altLang="zh-CN" sz="2000" dirty="0">
+                <a:solidFill>
+                  <a:srgbClr val="000000"/>
+                </a:solidFill>
+                <a:latin typeface="Microsoft YaHei"/>
+                <a:ea typeface="Microsoft YaHei"/>
+                <a:cs typeface="Microsoft YaHei"/>
+              </a:rPr>
+              <a:t>AI </a:t>
+            </a:r>
+            <a:r>
+              <a:rPr lang="zh-CN" altLang="en-US" sz="2000" dirty="0">
+                <a:solidFill>
+                  <a:srgbClr val="000000"/>
+                </a:solidFill>
+                <a:latin typeface="Microsoft YaHei"/>
+                <a:ea typeface="Microsoft YaHei"/>
+                <a:cs typeface="Microsoft YaHei"/>
+              </a:rPr>
+              <a:t>写作</a:t>
+            </a:r>
           </a:p>
           <a:p>
             <a:pPr marL="190500" indent="-190500">
@@ -13404,26 +14473,26 @@
               <a:buChar char="•"/>
             </a:pPr>
             <a:r>
-              <a:rPr sz="2000" dirty="0" err="1">
-                <a:solidFill>
-                  <a:srgbClr val="000000"/>
-                </a:solidFill>
-                <a:latin typeface="Microsoft YaHei"/>
-                <a:ea typeface="Microsoft YaHei"/>
-                <a:cs typeface="Microsoft YaHei"/>
-              </a:rPr>
-              <a:t>润色</a:t>
-            </a:r>
-            <a:r>
-              <a:rPr sz="2000" dirty="0">
-                <a:solidFill>
-                  <a:srgbClr val="000000"/>
-                </a:solidFill>
-                <a:latin typeface="Microsoft YaHei"/>
-                <a:ea typeface="Microsoft YaHei"/>
-                <a:cs typeface="Microsoft YaHei"/>
-              </a:rPr>
-              <a:t>: </a:t>
+              <a:rPr lang="zh-CN" altLang="en-US" sz="2000" dirty="0">
+                <a:solidFill>
+                  <a:srgbClr val="000000"/>
+                </a:solidFill>
+                <a:latin typeface="Microsoft YaHei"/>
+                <a:ea typeface="Microsoft YaHei"/>
+                <a:cs typeface="Microsoft YaHei"/>
+              </a:rPr>
+              <a:t>润色、语法检查：</a:t>
+            </a:r>
+            <a:r>
+              <a:rPr lang="en-US" altLang="zh-CN" sz="2000" dirty="0">
+                <a:solidFill>
+                  <a:srgbClr val="000000"/>
+                </a:solidFill>
+                <a:latin typeface="Microsoft YaHei"/>
+                <a:ea typeface="Microsoft YaHei"/>
+                <a:cs typeface="Microsoft YaHei"/>
+              </a:rPr>
+              <a:t> </a:t>
             </a:r>
           </a:p>
           <a:p>
@@ -13553,15 +14622,15 @@
               <a:t>画图</a:t>
             </a:r>
             <a:r>
-              <a:rPr sz="2000" dirty="0">
-                <a:solidFill>
-                  <a:srgbClr val="000000"/>
-                </a:solidFill>
-                <a:latin typeface="Microsoft YaHei"/>
-                <a:ea typeface="Microsoft YaHei"/>
-                <a:cs typeface="Microsoft YaHei"/>
-              </a:rPr>
-              <a:t>: </a:t>
+              <a:rPr lang="zh-CN" altLang="en-US" sz="2000" dirty="0">
+                <a:solidFill>
+                  <a:srgbClr val="000000"/>
+                </a:solidFill>
+                <a:latin typeface="Microsoft YaHei"/>
+                <a:ea typeface="Microsoft YaHei"/>
+                <a:cs typeface="Microsoft YaHei"/>
+              </a:rPr>
+              <a:t>：</a:t>
             </a:r>
             <a:r>
               <a:rPr sz="1600" dirty="0">
@@ -13615,7 +14684,7 @@
                 <a:ea typeface="Microsoft YaHei"/>
                 <a:cs typeface="Microsoft YaHei"/>
               </a:rPr>
-              <a:t>做</a:t>
+              <a:t>做PPT</a:t>
             </a:r>
             <a:r>
               <a:rPr sz="2000" dirty="0">
@@ -13626,7 +14695,7 @@
                 <a:ea typeface="Microsoft YaHei"/>
                 <a:cs typeface="Microsoft YaHei"/>
               </a:rPr>
-              <a:t> PPT： </a:t>
+              <a:t>： </a:t>
             </a:r>
             <a:r>
               <a:rPr sz="1600" dirty="0">
@@ -14145,8 +15214,8 @@
         </p:nvSpPr>
         <p:spPr>
           <a:xfrm>
-            <a:off x="457200" y="1263671"/>
-            <a:ext cx="8229600" cy="3278277"/>
+            <a:off x="457200" y="1079500"/>
+            <a:ext cx="8229600" cy="3693667"/>
           </a:xfrm>
           <a:prstGeom prst="roundRect">
             <a:avLst>
@@ -14187,8 +15256,8 @@
         </p:nvSpPr>
         <p:spPr>
           <a:xfrm>
-            <a:off x="777240" y="1519703"/>
-            <a:ext cx="7589520" cy="2949265"/>
+            <a:off x="777240" y="1162794"/>
+            <a:ext cx="7589520" cy="3548906"/>
           </a:xfrm>
           <a:prstGeom prst="rect">
             <a:avLst/>
@@ -14269,6 +15338,131 @@
                 <a:cs typeface="Microsoft YaHei"/>
               </a:rPr>
               <a:t>’太重</a:t>
+            </a:r>
+            <a:endParaRPr lang="en-US" altLang="zh-CN" sz="2000" dirty="0">
+              <a:solidFill>
+                <a:srgbClr val="000000"/>
+              </a:solidFill>
+              <a:latin typeface="Microsoft YaHei"/>
+              <a:ea typeface="Microsoft YaHei"/>
+              <a:cs typeface="Microsoft YaHei"/>
+            </a:endParaRPr>
+          </a:p>
+          <a:p>
+            <a:pPr marL="190500" indent="-190500" algn="l">
+              <a:spcAft>
+                <a:spcPts val="800"/>
+              </a:spcAft>
+              <a:buChar char="•"/>
+              <a:defRPr sz="2000">
+                <a:solidFill>
+                  <a:srgbClr val="000000"/>
+                </a:solidFill>
+                <a:latin typeface="Microsoft YaHei"/>
+                <a:ea typeface="Microsoft YaHei"/>
+                <a:cs typeface="Microsoft YaHei"/>
+              </a:defRPr>
+            </a:pPr>
+            <a:r>
+              <a:rPr lang="zh-CN" altLang="en-US" sz="2000" dirty="0">
+                <a:solidFill>
+                  <a:srgbClr val="000000"/>
+                </a:solidFill>
+                <a:latin typeface="Microsoft YaHei"/>
+                <a:ea typeface="Microsoft YaHei"/>
+                <a:cs typeface="Microsoft YaHei"/>
+              </a:rPr>
+              <a:t>结果解释太表面（</a:t>
+            </a:r>
+            <a:r>
+              <a:rPr lang="en-US" altLang="zh-CN" sz="2000" dirty="0">
+                <a:solidFill>
+                  <a:srgbClr val="000000"/>
+                </a:solidFill>
+                <a:latin typeface="Microsoft YaHei"/>
+                <a:ea typeface="Microsoft YaHei"/>
+                <a:cs typeface="Microsoft YaHei"/>
+              </a:rPr>
+              <a:t>/wait-what</a:t>
+            </a:r>
+            <a:r>
+              <a:rPr lang="zh-CN" altLang="en-US" sz="2000" dirty="0">
+                <a:solidFill>
+                  <a:srgbClr val="000000"/>
+                </a:solidFill>
+                <a:latin typeface="Microsoft YaHei"/>
+                <a:ea typeface="Microsoft YaHei"/>
+                <a:cs typeface="Microsoft YaHei"/>
+              </a:rPr>
+              <a:t>）</a:t>
+            </a:r>
+            <a:endParaRPr lang="en-US" altLang="zh-CN" sz="2000" dirty="0">
+              <a:solidFill>
+                <a:srgbClr val="000000"/>
+              </a:solidFill>
+              <a:latin typeface="Microsoft YaHei"/>
+              <a:ea typeface="Microsoft YaHei"/>
+              <a:cs typeface="Microsoft YaHei"/>
+            </a:endParaRPr>
+          </a:p>
+          <a:p>
+            <a:pPr marL="190500" indent="-190500" algn="l">
+              <a:spcAft>
+                <a:spcPts val="800"/>
+              </a:spcAft>
+              <a:buChar char="•"/>
+              <a:defRPr sz="2000">
+                <a:solidFill>
+                  <a:srgbClr val="000000"/>
+                </a:solidFill>
+                <a:latin typeface="Microsoft YaHei"/>
+                <a:ea typeface="Microsoft YaHei"/>
+                <a:cs typeface="Microsoft YaHei"/>
+              </a:defRPr>
+            </a:pPr>
+            <a:r>
+              <a:rPr lang="en-US" sz="2000" dirty="0" err="1">
+                <a:solidFill>
+                  <a:srgbClr val="000000"/>
+                </a:solidFill>
+                <a:latin typeface="Microsoft YaHei"/>
+                <a:ea typeface="Microsoft YaHei"/>
+                <a:cs typeface="Microsoft YaHei"/>
+              </a:rPr>
+              <a:t>如何高质量提问</a:t>
+            </a:r>
+            <a:r>
+              <a:rPr lang="zh-CN" altLang="en-US" sz="2000" dirty="0">
+                <a:solidFill>
+                  <a:srgbClr val="000000"/>
+                </a:solidFill>
+                <a:latin typeface="Microsoft YaHei"/>
+                <a:ea typeface="Microsoft YaHei"/>
+                <a:cs typeface="Microsoft YaHei"/>
+              </a:rPr>
+              <a:t>（提供足够 </a:t>
+            </a:r>
+            <a:r>
+              <a:rPr lang="en-US" altLang="zh-CN" sz="2000" dirty="0">
+                <a:solidFill>
+                  <a:srgbClr val="000000"/>
+                </a:solidFill>
+                <a:latin typeface="Microsoft YaHei"/>
+                <a:ea typeface="Microsoft YaHei"/>
+                <a:cs typeface="Microsoft YaHei"/>
+              </a:rPr>
+              <a:t>context</a:t>
+            </a:r>
+            <a:r>
+              <a:rPr lang="zh-CN" altLang="en-US" sz="2000" dirty="0">
+                <a:solidFill>
+                  <a:srgbClr val="000000"/>
+                </a:solidFill>
+                <a:latin typeface="Microsoft YaHei"/>
+                <a:ea typeface="Microsoft YaHei"/>
+                <a:cs typeface="Microsoft YaHei"/>
+              </a:rPr>
+              <a:t>、明确需求）</a:t>
             </a:r>
             <a:endParaRPr lang="en-US" sz="2000" dirty="0">
               <a:solidFill>
@@ -14353,6 +15547,39 @@
               <a:t>AGENTS.md</a:t>
             </a:r>
             <a:r>
+              <a:rPr lang="zh-CN" altLang="en-US" sz="2000" dirty="0">
+                <a:solidFill>
+                  <a:srgbClr val="000000"/>
+                </a:solidFill>
+                <a:latin typeface="Microsoft YaHei"/>
+                <a:ea typeface="Microsoft YaHei"/>
+                <a:cs typeface="Microsoft YaHei"/>
+              </a:rPr>
+              <a:t>、让 </a:t>
+            </a:r>
+            <a:r>
+              <a:rPr lang="en-US" altLang="zh-CN" sz="2000" dirty="0">
+                <a:solidFill>
+                  <a:srgbClr val="000000"/>
+                </a:solidFill>
+                <a:latin typeface="Microsoft YaHei"/>
+                <a:ea typeface="Microsoft YaHei"/>
+                <a:cs typeface="Microsoft YaHei"/>
+              </a:rPr>
+              <a:t>AI </a:t>
+            </a:r>
+            <a:r>
+              <a:rPr lang="zh-CN" altLang="en-US" sz="2000" dirty="0">
+                <a:solidFill>
+                  <a:srgbClr val="000000"/>
+                </a:solidFill>
+                <a:latin typeface="Microsoft YaHei"/>
+                <a:ea typeface="Microsoft YaHei"/>
+                <a:cs typeface="Microsoft YaHei"/>
+              </a:rPr>
+              <a:t>自检</a:t>
+            </a:r>
+            <a:r>
               <a:rPr lang="zh-CN" altLang="en-GB" sz="2000" dirty="0">
                 <a:solidFill>
                   <a:srgbClr val="000000"/>
@@ -14500,9 +15727,28 @@
               </a:rPr>
               <a:t> AI</a:t>
             </a:r>
-          </a:p>
-          <a:p>
-            <a:pPr marL="190500" indent="-190500" algn="l">
+            <a:r>
+              <a:rPr lang="zh-CN" altLang="en-US" sz="2000" dirty="0">
+                <a:solidFill>
+                  <a:srgbClr val="000000"/>
+                </a:solidFill>
+                <a:latin typeface="Microsoft YaHei"/>
+                <a:ea typeface="Microsoft YaHei"/>
+                <a:cs typeface="Microsoft YaHei"/>
+              </a:rPr>
+              <a:t>（在本地管理数据）</a:t>
+            </a:r>
+            <a:endParaRPr sz="2000" dirty="0">
+              <a:solidFill>
+                <a:srgbClr val="000000"/>
+              </a:solidFill>
+              <a:latin typeface="Microsoft YaHei"/>
+              <a:ea typeface="Microsoft YaHei"/>
+              <a:cs typeface="Microsoft YaHei"/>
+            </a:endParaRPr>
+          </a:p>
+          <a:p>
+            <a:pPr marL="190500" indent="-190500">
               <a:spcAft>
                 <a:spcPts val="800"/>
               </a:spcAft>
@@ -14569,7 +15815,7 @@
                 <a:ea typeface="Microsoft YaHei"/>
                 <a:cs typeface="Microsoft YaHei"/>
               </a:rPr>
-              <a:t>代码、代码报错</a:t>
+              <a:t>代码、代码报错（学习编程基础、开发环境管理、面向对象与模块化开发等知识）</a:t>
             </a:r>
             <a:endParaRPr lang="en-US" altLang="zh-CN" sz="2000" dirty="0">
               <a:solidFill>
@@ -19391,16 +20637,35 @@
               <a:buChar char="•"/>
             </a:pPr>
             <a:r>
-              <a:rPr sz="2000">
-                <a:solidFill>
-                  <a:srgbClr val="000000"/>
-                </a:solidFill>
-                <a:latin typeface="Microsoft YaHei"/>
-                <a:ea typeface="Microsoft YaHei"/>
-                <a:cs typeface="Microsoft YaHei"/>
-              </a:rPr>
-              <a:t>MCP: 一种外接工具的协议，比如网络搜索工具</a:t>
-            </a:r>
+              <a:rPr sz="2000" dirty="0">
+                <a:solidFill>
+                  <a:srgbClr val="000000"/>
+                </a:solidFill>
+                <a:latin typeface="Microsoft YaHei"/>
+                <a:ea typeface="Microsoft YaHei"/>
+                <a:cs typeface="Microsoft YaHei"/>
+              </a:rPr>
+              <a:t>MCP: </a:t>
+            </a:r>
+            <a:r>
+              <a:rPr sz="2000" dirty="0" err="1">
+                <a:solidFill>
+                  <a:srgbClr val="000000"/>
+                </a:solidFill>
+                <a:latin typeface="Microsoft YaHei"/>
+                <a:ea typeface="Microsoft YaHei"/>
+                <a:cs typeface="Microsoft YaHei"/>
+              </a:rPr>
+              <a:t>一种外接工具的协议，比如网络搜索工具</a:t>
+            </a:r>
+            <a:endParaRPr sz="2000" dirty="0">
+              <a:solidFill>
+                <a:srgbClr val="000000"/>
+              </a:solidFill>
+              <a:latin typeface="Microsoft YaHei"/>
+              <a:ea typeface="Microsoft YaHei"/>
+              <a:cs typeface="Microsoft YaHei"/>
+            </a:endParaRPr>
           </a:p>
           <a:p>
             <a:pPr marL="190500" indent="-190500" algn="l">
@@ -19411,15 +20676,59 @@
               <a:buChar char="•"/>
             </a:pPr>
             <a:r>
-              <a:rPr sz="2000">
-                <a:solidFill>
-                  <a:srgbClr val="000000"/>
-                </a:solidFill>
-                <a:latin typeface="Microsoft YaHei"/>
-                <a:ea typeface="Microsoft YaHei"/>
-                <a:cs typeface="Microsoft YaHei"/>
-              </a:rPr>
-              <a:t>Context7 (查询版本匹配的软件 API 文档)</a:t>
+              <a:rPr sz="2000" dirty="0">
+                <a:solidFill>
+                  <a:srgbClr val="000000"/>
+                </a:solidFill>
+                <a:latin typeface="Microsoft YaHei"/>
+                <a:ea typeface="Microsoft YaHei"/>
+                <a:cs typeface="Microsoft YaHei"/>
+              </a:rPr>
+              <a:t>Context7 (</a:t>
+            </a:r>
+            <a:r>
+              <a:rPr sz="2000" dirty="0" err="1">
+                <a:solidFill>
+                  <a:srgbClr val="000000"/>
+                </a:solidFill>
+                <a:latin typeface="Microsoft YaHei"/>
+                <a:ea typeface="Microsoft YaHei"/>
+                <a:cs typeface="Microsoft YaHei"/>
+              </a:rPr>
+              <a:t>查询版本匹配的软件</a:t>
+            </a:r>
+            <a:r>
+              <a:rPr sz="2000" dirty="0">
+                <a:solidFill>
+                  <a:srgbClr val="000000"/>
+                </a:solidFill>
+                <a:latin typeface="Microsoft YaHei"/>
+                <a:ea typeface="Microsoft YaHei"/>
+                <a:cs typeface="Microsoft YaHei"/>
+              </a:rPr>
+              <a:t> API </a:t>
+            </a:r>
+            <a:r>
+              <a:rPr sz="2000" dirty="0" err="1">
+                <a:solidFill>
+                  <a:srgbClr val="000000"/>
+                </a:solidFill>
+                <a:latin typeface="Microsoft YaHei"/>
+                <a:ea typeface="Microsoft YaHei"/>
+                <a:cs typeface="Microsoft YaHei"/>
+              </a:rPr>
+              <a:t>文档</a:t>
+            </a:r>
+            <a:r>
+              <a:rPr sz="2000" dirty="0">
+                <a:solidFill>
+                  <a:srgbClr val="000000"/>
+                </a:solidFill>
+                <a:latin typeface="Microsoft YaHei"/>
+                <a:ea typeface="Microsoft YaHei"/>
+                <a:cs typeface="Microsoft YaHei"/>
+              </a:rPr>
+              <a:t>)</a:t>
             </a:r>
           </a:p>
           <a:p>
@@ -19431,16 +20740,35 @@
               <a:buChar char="•"/>
             </a:pPr>
             <a:r>
-              <a:rPr sz="2000">
-                <a:solidFill>
-                  <a:srgbClr val="000000"/>
-                </a:solidFill>
-                <a:latin typeface="Microsoft YaHei"/>
-                <a:ea typeface="Microsoft YaHei"/>
-                <a:cs typeface="Microsoft YaHei"/>
-              </a:rPr>
-              <a:t>Playwright: 操作浏览器、前端开发测试</a:t>
-            </a:r>
+              <a:rPr sz="2000" dirty="0">
+                <a:solidFill>
+                  <a:srgbClr val="000000"/>
+                </a:solidFill>
+                <a:latin typeface="Microsoft YaHei"/>
+                <a:ea typeface="Microsoft YaHei"/>
+                <a:cs typeface="Microsoft YaHei"/>
+              </a:rPr>
+              <a:t>Playwright: </a:t>
+            </a:r>
+            <a:r>
+              <a:rPr sz="2000" dirty="0" err="1">
+                <a:solidFill>
+                  <a:srgbClr val="000000"/>
+                </a:solidFill>
+                <a:latin typeface="Microsoft YaHei"/>
+                <a:ea typeface="Microsoft YaHei"/>
+                <a:cs typeface="Microsoft YaHei"/>
+              </a:rPr>
+              <a:t>操作浏览器、前端开发测试</a:t>
+            </a:r>
+            <a:endParaRPr lang="en-US" sz="2000" dirty="0">
+              <a:solidFill>
+                <a:srgbClr val="000000"/>
+              </a:solidFill>
+              <a:latin typeface="Microsoft YaHei"/>
+              <a:ea typeface="Microsoft YaHei"/>
+              <a:cs typeface="Microsoft YaHei"/>
+            </a:endParaRPr>
           </a:p>
           <a:p>
             <a:pPr marL="190500" indent="-190500">
@@ -19450,7 +20778,68 @@
               <a:buSzPct val="100000"/>
               <a:buChar char="•"/>
             </a:pPr>
-            <a:endParaRPr sz="2000"/>
+            <a:r>
+              <a:rPr lang="en-US" altLang="zh-CN" sz="2000" dirty="0">
+                <a:solidFill>
+                  <a:srgbClr val="000000"/>
+                </a:solidFill>
+                <a:latin typeface="Microsoft YaHei"/>
+                <a:ea typeface="Microsoft YaHei"/>
+                <a:cs typeface="Microsoft YaHei"/>
+              </a:rPr>
+              <a:t>MCP</a:t>
+            </a:r>
+            <a:r>
+              <a:rPr lang="zh-CN" altLang="en-US" sz="2000" dirty="0">
+                <a:solidFill>
+                  <a:srgbClr val="000000"/>
+                </a:solidFill>
+                <a:latin typeface="Microsoft YaHei"/>
+                <a:ea typeface="Microsoft YaHei"/>
+                <a:cs typeface="Microsoft YaHei"/>
+              </a:rPr>
+              <a:t>与 </a:t>
+            </a:r>
+            <a:r>
+              <a:rPr lang="en-US" altLang="zh-CN" sz="2000" dirty="0">
+                <a:solidFill>
+                  <a:srgbClr val="000000"/>
+                </a:solidFill>
+                <a:latin typeface="Microsoft YaHei"/>
+                <a:ea typeface="Microsoft YaHei"/>
+                <a:cs typeface="Microsoft YaHei"/>
+              </a:rPr>
+              <a:t>skill </a:t>
+            </a:r>
+            <a:r>
+              <a:rPr lang="zh-CN" altLang="en-US" sz="2000" dirty="0">
+                <a:solidFill>
+                  <a:srgbClr val="000000"/>
+                </a:solidFill>
+                <a:latin typeface="Microsoft YaHei"/>
+                <a:ea typeface="Microsoft YaHei"/>
+                <a:cs typeface="Microsoft YaHei"/>
+              </a:rPr>
+              <a:t>的区别 </a:t>
+            </a:r>
+            <a:endParaRPr sz="2000" dirty="0">
+              <a:solidFill>
+                <a:srgbClr val="000000"/>
+              </a:solidFill>
+              <a:latin typeface="Microsoft YaHei"/>
+              <a:ea typeface="Microsoft YaHei"/>
+              <a:cs typeface="Microsoft YaHei"/>
+            </a:endParaRPr>
+          </a:p>
+          <a:p>
+            <a:pPr marL="190500" indent="-190500">
+              <a:spcAft>
+                <a:spcPts val="1400"/>
+              </a:spcAft>
+              <a:buSzPct val="100000"/>
+              <a:buChar char="•"/>
+            </a:pPr>
+            <a:endParaRPr sz="2000" dirty="0"/>
           </a:p>
         </p:txBody>
       </p:sp>
@@ -19522,7 +20911,7 @@
         </p:blipFill>
         <p:spPr>
           <a:xfrm>
-            <a:off x="914401" y="3336407"/>
+            <a:off x="4181426" y="3366458"/>
             <a:ext cx="4345354" cy="1110842"/>
           </a:xfrm>
           <a:prstGeom prst="rect">
